--- a/Y9_Exploring_Science/9A_Genetics_and_evolution/9A_L04_DNA_chromosomes_and_genes.pptx
+++ b/Y9_Exploring_Science/9A_Genetics_and_evolution/9A_L04_DNA_chromosomes_and_genes.pptx
@@ -1740,7 +1740,7 @@
         <p:spPr>
           <a:xfrm>
             <a:off x="548640" y="3657600"/>
-            <a:ext cx="10515600" cy="914400"/>
+            <a:ext cx="10515600" cy="1097280"/>
           </a:xfrm>
           <a:prstGeom prst="rect">
             <a:avLst/>
@@ -1753,7 +1753,7 @@
           <a:lstStyle>
             <a:lvl1pPr indent="0" marL="0">
               <a:buNone/>
-              <a:defRPr lang="en-US" sz="2000" dirty="0">
+              <a:defRPr lang="en-US" sz="2400" dirty="0">
                 <a:solidFill>
                   <a:srgbClr val="FFFFFF"/>
                 </a:solidFill>
@@ -1764,7 +1764,7 @@
             <a:pPr indent="0" marL="0">
               <a:buNone/>
             </a:pPr>
-            <a:endParaRPr lang="en-US" sz="2000" dirty="0"/>
+            <a:endParaRPr lang="en-US" sz="2400" dirty="0"/>
           </a:p>
         </p:txBody>
       </p:sp>
@@ -1864,14 +1864,14 @@
               <a:buNone/>
             </a:pPr>
             <a:r>
-              <a:rPr lang="en-US" sz="900" dirty="0">
+              <a:rPr lang="en-US" sz="1000" dirty="0">
                 <a:solidFill>
                   <a:srgbClr val="5B6574"/>
                 </a:solidFill>
               </a:rPr>
               <a:t>Year 9 Science  |  9A Genetics and evolution  |  Lesson 4: DNA, chromosomes and genes</a:t>
             </a:r>
-            <a:endParaRPr lang="en-US" sz="900" dirty="0"/>
+            <a:endParaRPr lang="en-US" sz="1000" dirty="0"/>
           </a:p>
         </p:txBody>
       </p:sp>
@@ -2040,14 +2040,14 @@
               <a:buNone/>
             </a:pPr>
             <a:r>
-              <a:rPr lang="en-US" sz="900" dirty="0">
+              <a:rPr lang="en-US" sz="1000" dirty="0">
                 <a:solidFill>
                   <a:srgbClr val="5B6574"/>
                 </a:solidFill>
               </a:rPr>
               <a:t>Year 9 Science  |  9A Genetics and evolution  |  Lesson 4: DNA, chromosomes and genes</a:t>
             </a:r>
-            <a:endParaRPr lang="en-US" sz="900" dirty="0"/>
+            <a:endParaRPr lang="en-US" sz="1000" dirty="0"/>
           </a:p>
         </p:txBody>
       </p:sp>
@@ -2216,14 +2216,14 @@
               <a:buNone/>
             </a:pPr>
             <a:r>
-              <a:rPr lang="en-US" sz="900" dirty="0">
+              <a:rPr lang="en-US" sz="1000" dirty="0">
                 <a:solidFill>
                   <a:srgbClr val="5B6574"/>
                 </a:solidFill>
               </a:rPr>
               <a:t>Year 9 Science  |  9A Genetics and evolution  |  Lesson 4: DNA, chromosomes and genes</a:t>
             </a:r>
-            <a:endParaRPr lang="en-US" sz="900" dirty="0"/>
+            <a:endParaRPr lang="en-US" sz="1000" dirty="0"/>
           </a:p>
         </p:txBody>
       </p:sp>
@@ -2352,7 +2352,7 @@
           <a:lstStyle>
             <a:lvl1pPr indent="0" marL="0">
               <a:buNone/>
-              <a:defRPr lang="en-US" sz="3000" b="1" dirty="0">
+              <a:defRPr lang="en-US" sz="3400" b="1" dirty="0">
                 <a:solidFill>
                   <a:srgbClr val="3A2E00"/>
                 </a:solidFill>
@@ -2363,7 +2363,7 @@
             <a:pPr indent="0" marL="0">
               <a:buNone/>
             </a:pPr>
-            <a:endParaRPr lang="en-US" sz="3000" dirty="0"/>
+            <a:endParaRPr lang="en-US" sz="3400" dirty="0"/>
           </a:p>
         </p:txBody>
       </p:sp>
@@ -2780,14 +2780,14 @@
               <a:buNone/>
             </a:pPr>
             <a:r>
-              <a:rPr lang="en-US" sz="1300" b="1" spc="200" kern="0" dirty="0">
+              <a:rPr lang="en-US" sz="1400" b="1" spc="200" kern="0" dirty="0">
                 <a:solidFill>
                   <a:srgbClr val="F2CE3E"/>
                 </a:solidFill>
               </a:rPr>
               <a:t>YEAR 9 SCIENCE  ·  9A GENETICS AND EVOLUTION  ·  LESSON 4 OF 7</a:t>
             </a:r>
-            <a:endParaRPr lang="en-US" sz="1300" dirty="0"/>
+            <a:endParaRPr lang="en-US" sz="1400" dirty="0"/>
           </a:p>
         </p:txBody>
       </p:sp>
@@ -2840,7 +2840,7 @@
         <p:spPr>
           <a:xfrm>
             <a:off x="548640" y="3657600"/>
-            <a:ext cx="10515600" cy="914400"/>
+            <a:ext cx="10515600" cy="1097280"/>
           </a:xfrm>
           <a:prstGeom prst="rect">
             <a:avLst/>
@@ -2856,14 +2856,14 @@
               <a:buNone/>
             </a:pPr>
             <a:r>
-              <a:rPr lang="en-US" sz="2000" dirty="0">
+              <a:rPr lang="en-US" sz="2400" dirty="0">
                 <a:solidFill>
                   <a:srgbClr val="FFFFFF"/>
                 </a:solidFill>
               </a:rPr>
               <a:t>How is genetic information stored?</a:t>
             </a:r>
-            <a:endParaRPr lang="en-US" sz="2000" dirty="0"/>
+            <a:endParaRPr lang="en-US" sz="2400" dirty="0"/>
           </a:p>
         </p:txBody>
       </p:sp>
@@ -2892,14 +2892,14 @@
               <a:buNone/>
             </a:pPr>
             <a:r>
-              <a:rPr lang="en-US" sz="1200" dirty="0">
+              <a:rPr lang="en-US" sz="1400" dirty="0">
                 <a:solidFill>
                   <a:srgbClr val="C9D3E6"/>
                 </a:solidFill>
               </a:rPr>
               <a:t>Exploring Science International 9  ·  Student Book pages 12 to 13  ·  Workbook pages 8 to 9</a:t>
             </a:r>
-            <a:endParaRPr lang="en-US" sz="1200" dirty="0"/>
+            <a:endParaRPr lang="en-US" sz="1400" dirty="0"/>
           </a:p>
         </p:txBody>
       </p:sp>
@@ -3207,23 +3207,21 @@
           <a:ln/>
         </p:spPr>
         <p:txBody>
-          <a:bodyPr wrap="square" lIns="0" tIns="0" rIns="0" bIns="0" rtlCol="0" anchor="t">
-            <a:normAutofit/>
-          </a:bodyPr>
+          <a:bodyPr wrap="square" lIns="0" tIns="0" rIns="0" bIns="0" rtlCol="0" anchor="t"/>
           <a:lstStyle/>
           <a:p>
             <a:pPr indent="0" marL="0">
               <a:buNone/>
             </a:pPr>
             <a:r>
-              <a:rPr lang="en-US" sz="1700" dirty="0">
+              <a:rPr lang="en-US" sz="2000" dirty="0">
                 <a:solidFill>
                   <a:srgbClr val="141B26"/>
                 </a:solidFill>
               </a:rPr>
               <a:t>Core: match the scientists; write the numbers; order cell, nucleus, chromosome and gene by size; read the karyotype.</a:t>
             </a:r>
-            <a:endParaRPr lang="en-US" sz="1700" dirty="0"/>
+            <a:endParaRPr lang="en-US" sz="2000" dirty="0"/>
           </a:p>
         </p:txBody>
       </p:sp>
@@ -3306,23 +3304,21 @@
           <a:ln/>
         </p:spPr>
         <p:txBody>
-          <a:bodyPr wrap="square" lIns="0" tIns="0" rIns="0" bIns="0" rtlCol="0" anchor="t">
-            <a:normAutofit/>
-          </a:bodyPr>
+          <a:bodyPr wrap="square" lIns="0" tIns="0" rIns="0" bIns="0" rtlCol="0" anchor="t"/>
           <a:lstStyle/>
           <a:p>
             <a:pPr indent="0" marL="0">
               <a:buNone/>
             </a:pPr>
             <a:r>
-              <a:rPr lang="en-US" sz="1700" dirty="0">
+              <a:rPr lang="en-US" sz="2000" dirty="0">
                 <a:solidFill>
                   <a:srgbClr val="141B26"/>
                 </a:solidFill>
               </a:rPr>
               <a:t>Stretch: plot the chromosome numbers of five animals in a logical order, then judge the conclusion about birds and mammals.</a:t>
             </a:r>
-            <a:endParaRPr lang="en-US" sz="1700" dirty="0"/>
+            <a:endParaRPr lang="en-US" sz="2000" dirty="0"/>
           </a:p>
         </p:txBody>
       </p:sp>
@@ -3405,23 +3401,21 @@
           <a:ln/>
         </p:spPr>
         <p:txBody>
-          <a:bodyPr wrap="square" lIns="0" tIns="0" rIns="0" bIns="0" rtlCol="0" anchor="t">
-            <a:normAutofit/>
-          </a:bodyPr>
+          <a:bodyPr wrap="square" lIns="0" tIns="0" rIns="0" bIns="0" rtlCol="0" anchor="t"/>
           <a:lstStyle/>
           <a:p>
             <a:pPr indent="0" marL="0">
               <a:buNone/>
             </a:pPr>
             <a:r>
-              <a:rPr lang="en-US" sz="1700" dirty="0">
+              <a:rPr lang="en-US" sz="2000" dirty="0">
                 <a:solidFill>
                   <a:srgbClr val="141B26"/>
                 </a:solidFill>
               </a:rPr>
               <a:t>Challenge: draw the links between DNA, chromosomes, genes and genetic information; explain how scientists share data.</a:t>
             </a:r>
-            <a:endParaRPr lang="en-US" sz="1700" dirty="0"/>
+            <a:endParaRPr lang="en-US" sz="2000" dirty="0"/>
           </a:p>
         </p:txBody>
       </p:sp>
@@ -3504,23 +3498,21 @@
           <a:ln/>
         </p:spPr>
         <p:txBody>
-          <a:bodyPr wrap="square" lIns="0" tIns="0" rIns="0" bIns="0" rtlCol="0" anchor="t">
-            <a:normAutofit/>
-          </a:bodyPr>
+          <a:bodyPr wrap="square" lIns="0" tIns="0" rIns="0" bIns="0" rtlCol="0" anchor="t"/>
           <a:lstStyle/>
           <a:p>
             <a:pPr indent="0" marL="0">
               <a:buNone/>
             </a:pPr>
             <a:r>
-              <a:rPr lang="en-US" sz="1700" dirty="0">
+              <a:rPr lang="en-US" sz="2000" dirty="0">
                 <a:solidFill>
                   <a:srgbClr val="141B26"/>
                 </a:solidFill>
               </a:rPr>
               <a:t>Use the key words box: DNA, chromosome, gene, nucleus.</a:t>
             </a:r>
-            <a:endParaRPr lang="en-US" sz="1700" dirty="0"/>
+            <a:endParaRPr lang="en-US" sz="2000" dirty="0"/>
           </a:p>
         </p:txBody>
       </p:sp>
@@ -3549,14 +3541,14 @@
               <a:buNone/>
             </a:pPr>
             <a:r>
-              <a:rPr lang="en-US" sz="1300" i="1" dirty="0">
+              <a:rPr lang="en-US" sz="1500" i="1" dirty="0">
                 <a:solidFill>
                   <a:srgbClr val="5B6574"/>
                 </a:solidFill>
               </a:rPr>
               <a:t>Numbers to remember: 46 in a body cell, 23 in a gamete, 1 DNA molecule per chromosome.</a:t>
             </a:r>
-            <a:endParaRPr lang="en-US" sz="1300" dirty="0"/>
+            <a:endParaRPr lang="en-US" sz="1500" dirty="0"/>
           </a:p>
         </p:txBody>
       </p:sp>
@@ -3749,23 +3741,21 @@
           <a:ln/>
         </p:spPr>
         <p:txBody>
-          <a:bodyPr wrap="square" lIns="0" tIns="0" rIns="0" bIns="0" rtlCol="0" anchor="t">
-            <a:normAutofit/>
-          </a:bodyPr>
+          <a:bodyPr wrap="square" lIns="0" tIns="0" rIns="0" bIns="0" rtlCol="0" anchor="t"/>
           <a:lstStyle/>
           <a:p>
             <a:pPr indent="0" marL="0">
               <a:buNone/>
             </a:pPr>
             <a:r>
-              <a:rPr lang="en-US" sz="2200" b="1" dirty="0">
+              <a:rPr lang="en-US" sz="2600" b="1" dirty="0">
                 <a:solidFill>
                   <a:srgbClr val="0F2A5F"/>
                 </a:solidFill>
               </a:rPr>
               <a:t>Textbooks often call the double helix 'Watson and Crick's model'. Franklin's X-ray photo was shown to Watson without her permission, and she died before the Nobel Prize. Should the discovery carry only two names?</a:t>
             </a:r>
-            <a:endParaRPr lang="en-US" sz="2200" dirty="0"/>
+            <a:endParaRPr lang="en-US" sz="2600" dirty="0"/>
           </a:p>
         </p:txBody>
       </p:sp>
@@ -3814,9 +3804,7 @@
           <a:ln/>
         </p:spPr>
         <p:txBody>
-          <a:bodyPr wrap="square" lIns="0" tIns="0" rIns="0" bIns="0" rtlCol="0" anchor="t">
-            <a:normAutofit/>
-          </a:bodyPr>
+          <a:bodyPr wrap="square" lIns="0" tIns="0" rIns="0" bIns="0" rtlCol="0" anchor="t"/>
           <a:lstStyle/>
           <a:p>
             <a:pPr indent="0" marL="0">
@@ -3826,14 +3814,14 @@
               <a:buNone/>
             </a:pPr>
             <a:r>
-              <a:rPr lang="en-US" sz="1500" b="1" dirty="0">
+              <a:rPr lang="en-US" sz="1800" b="1" dirty="0">
                 <a:solidFill>
                   <a:srgbClr val="7B3A8E"/>
                 </a:solidFill>
               </a:rPr>
               <a:t>Sentence frames</a:t>
             </a:r>
-            <a:endParaRPr lang="en-US" sz="1500" dirty="0"/>
+            <a:endParaRPr lang="en-US" sz="1800" dirty="0"/>
           </a:p>
           <a:p>
             <a:pPr indent="0" marL="0">
@@ -3843,14 +3831,14 @@
               <a:buNone/>
             </a:pPr>
             <a:r>
-              <a:rPr lang="en-US" sz="1500" dirty="0">
+              <a:rPr lang="en-US" sz="1800" dirty="0">
                 <a:solidFill>
                   <a:srgbClr val="141B26"/>
                 </a:solidFill>
               </a:rPr>
               <a:t>I think the discovery should be called ___ because ___.</a:t>
             </a:r>
-            <a:endParaRPr lang="en-US" sz="1500" dirty="0"/>
+            <a:endParaRPr lang="en-US" sz="1800" dirty="0"/>
           </a:p>
           <a:p>
             <a:pPr indent="0" marL="0">
@@ -3860,14 +3848,14 @@
               <a:buNone/>
             </a:pPr>
             <a:r>
-              <a:rPr lang="en-US" sz="1500" dirty="0">
+              <a:rPr lang="en-US" sz="1800" dirty="0">
                 <a:solidFill>
                   <a:srgbClr val="141B26"/>
                 </a:solidFill>
               </a:rPr>
               <a:t>The evidence that mattered most was ___, which came from ___.</a:t>
             </a:r>
-            <a:endParaRPr lang="en-US" sz="1500" dirty="0"/>
+            <a:endParaRPr lang="en-US" sz="1800" dirty="0"/>
           </a:p>
           <a:p>
             <a:pPr indent="0" marL="0">
@@ -3877,14 +3865,14 @@
               <a:buNone/>
             </a:pPr>
             <a:r>
-              <a:rPr lang="en-US" sz="1500" dirty="0">
+              <a:rPr lang="en-US" sz="1800" dirty="0">
                 <a:solidFill>
                   <a:srgbClr val="141B26"/>
                 </a:solidFill>
               </a:rPr>
               <a:t>Today, scientists should share data by ___.</a:t>
             </a:r>
-            <a:endParaRPr lang="en-US" sz="1500" dirty="0"/>
+            <a:endParaRPr lang="en-US" sz="1800" dirty="0"/>
           </a:p>
         </p:txBody>
       </p:sp>
@@ -4084,14 +4072,14 @@
               <a:buNone/>
             </a:pPr>
             <a:r>
-              <a:rPr lang="en-US" sz="1400" i="1" dirty="0">
+              <a:rPr lang="en-US" sz="1600" i="1" dirty="0">
                 <a:solidFill>
                   <a:srgbClr val="5B6574"/>
                 </a:solidFill>
               </a:rPr>
               <a:t>On your worksheet exit ticket. Work alone. Hand it in as you leave.</a:t>
             </a:r>
-            <a:endParaRPr lang="en-US" sz="1400" dirty="0"/>
+            <a:endParaRPr lang="en-US" sz="1600" dirty="0"/>
           </a:p>
         </p:txBody>
       </p:sp>
@@ -4104,7 +4092,7 @@
         <p:spPr>
           <a:xfrm>
             <a:off x="548640" y="1828800"/>
-            <a:ext cx="10881360" cy="1188720"/>
+            <a:ext cx="9692640" cy="1188720"/>
           </a:xfrm>
           <a:prstGeom prst="rect">
             <a:avLst/>
@@ -4113,16 +4101,14 @@
           <a:ln/>
         </p:spPr>
         <p:txBody>
-          <a:bodyPr wrap="square" lIns="0" tIns="0" rIns="0" bIns="0" rtlCol="0" anchor="t">
-            <a:normAutofit/>
-          </a:bodyPr>
+          <a:bodyPr wrap="square" lIns="0" tIns="0" rIns="0" bIns="0" rtlCol="0" anchor="t"/>
           <a:lstStyle/>
           <a:p>
             <a:pPr indent="0" marL="0">
               <a:buNone/>
             </a:pPr>
             <a:r>
-              <a:rPr lang="en-US" sz="1800" b="1" dirty="0">
+              <a:rPr lang="en-US" sz="2200" b="1" dirty="0">
                 <a:solidFill>
                   <a:srgbClr val="7B3A8E"/>
                 </a:solidFill>
@@ -4133,14 +4119,14 @@
               <a:buNone/>
             </a:pPr>
             <a:r>
-              <a:rPr lang="en-US" sz="1800" dirty="0">
+              <a:rPr lang="en-US" sz="2200" dirty="0">
                 <a:solidFill>
                   <a:srgbClr val="141B26"/>
                 </a:solidFill>
               </a:rPr>
               <a:t>Where in a cell is DNA found?</a:t>
             </a:r>
-            <a:endParaRPr lang="en-US" sz="1800" dirty="0"/>
+            <a:endParaRPr lang="en-US" sz="2200" dirty="0"/>
           </a:p>
         </p:txBody>
       </p:sp>
@@ -4153,7 +4139,7 @@
         <p:spPr>
           <a:xfrm>
             <a:off x="548640" y="3017520"/>
-            <a:ext cx="10881360" cy="1188720"/>
+            <a:ext cx="9692640" cy="1188720"/>
           </a:xfrm>
           <a:prstGeom prst="rect">
             <a:avLst/>
@@ -4162,16 +4148,14 @@
           <a:ln/>
         </p:spPr>
         <p:txBody>
-          <a:bodyPr wrap="square" lIns="0" tIns="0" rIns="0" bIns="0" rtlCol="0" anchor="t">
-            <a:normAutofit/>
-          </a:bodyPr>
+          <a:bodyPr wrap="square" lIns="0" tIns="0" rIns="0" bIns="0" rtlCol="0" anchor="t"/>
           <a:lstStyle/>
           <a:p>
             <a:pPr indent="0" marL="0">
               <a:buNone/>
             </a:pPr>
             <a:r>
-              <a:rPr lang="en-US" sz="1800" b="1" dirty="0">
+              <a:rPr lang="en-US" sz="2200" b="1" dirty="0">
                 <a:solidFill>
                   <a:srgbClr val="7B3A8E"/>
                 </a:solidFill>
@@ -4182,14 +4166,14 @@
               <a:buNone/>
             </a:pPr>
             <a:r>
-              <a:rPr lang="en-US" sz="1800" dirty="0">
+              <a:rPr lang="en-US" sz="2200" dirty="0">
                 <a:solidFill>
                   <a:srgbClr val="141B26"/>
                 </a:solidFill>
               </a:rPr>
               <a:t>How many chromosomes are there in a human body cell, and in a human gamete?</a:t>
             </a:r>
-            <a:endParaRPr lang="en-US" sz="1800" dirty="0"/>
+            <a:endParaRPr lang="en-US" sz="2200" dirty="0"/>
           </a:p>
         </p:txBody>
       </p:sp>
@@ -4202,7 +4186,7 @@
         <p:spPr>
           <a:xfrm>
             <a:off x="548640" y="4206240"/>
-            <a:ext cx="10881360" cy="1188720"/>
+            <a:ext cx="9692640" cy="1188720"/>
           </a:xfrm>
           <a:prstGeom prst="rect">
             <a:avLst/>
@@ -4211,16 +4195,14 @@
           <a:ln/>
         </p:spPr>
         <p:txBody>
-          <a:bodyPr wrap="square" lIns="0" tIns="0" rIns="0" bIns="0" rtlCol="0" anchor="t">
-            <a:normAutofit/>
-          </a:bodyPr>
+          <a:bodyPr wrap="square" lIns="0" tIns="0" rIns="0" bIns="0" rtlCol="0" anchor="t"/>
           <a:lstStyle/>
           <a:p>
             <a:pPr indent="0" marL="0">
               <a:buNone/>
             </a:pPr>
             <a:r>
-              <a:rPr lang="en-US" sz="1800" b="1" dirty="0">
+              <a:rPr lang="en-US" sz="2200" b="1" dirty="0">
                 <a:solidFill>
                   <a:srgbClr val="7B3A8E"/>
                 </a:solidFill>
@@ -4231,14 +4213,14 @@
               <a:buNone/>
             </a:pPr>
             <a:r>
-              <a:rPr lang="en-US" sz="1800" dirty="0">
+              <a:rPr lang="en-US" sz="2200" dirty="0">
                 <a:solidFill>
                   <a:srgbClr val="141B26"/>
                 </a:solidFill>
               </a:rPr>
               <a:t>What is a gene?</a:t>
             </a:r>
-            <a:endParaRPr lang="en-US" sz="1800" dirty="0"/>
+            <a:endParaRPr lang="en-US" sz="2200" dirty="0"/>
           </a:p>
         </p:txBody>
       </p:sp>
@@ -4497,7 +4479,7 @@
         <p:spPr>
           <a:xfrm>
             <a:off x="548640" y="1371600"/>
-            <a:ext cx="10881360" cy="4480560"/>
+            <a:ext cx="10881360" cy="4114800"/>
           </a:xfrm>
           <a:prstGeom prst="rect">
             <a:avLst/>
@@ -4506,81 +4488,79 @@
           <a:ln/>
         </p:spPr>
         <p:txBody>
-          <a:bodyPr wrap="square" lIns="0" tIns="0" rIns="0" bIns="0" rtlCol="0" anchor="t">
-            <a:normAutofit/>
-          </a:bodyPr>
+          <a:bodyPr wrap="square" lIns="0" tIns="0" rIns="0" bIns="0" rtlCol="0" anchor="t"/>
           <a:lstStyle/>
           <a:p>
             <a:pPr marL="342900" indent="-342900">
               <a:spcAft>
-                <a:spcPts val="1000"/>
+                <a:spcPts val="1200"/>
               </a:spcAft>
               <a:buSzPct val="100000"/>
               <a:buChar char="✓"/>
             </a:pPr>
             <a:r>
-              <a:rPr lang="en-US" sz="1700" dirty="0">
+              <a:rPr lang="en-US" sz="2000" dirty="0">
                 <a:solidFill>
                   <a:srgbClr val="141B26"/>
                 </a:solidFill>
               </a:rPr>
               <a:t>The double helix structure of DNA was worked out in 1953 by Watson and Crick, using X-ray evidence from Franklin and Wilkins.</a:t>
             </a:r>
-            <a:endParaRPr lang="en-US" sz="1700" dirty="0"/>
+            <a:endParaRPr lang="en-US" sz="2000" dirty="0"/>
           </a:p>
           <a:p>
             <a:pPr marL="342900" indent="-342900">
               <a:spcAft>
-                <a:spcPts val="1000"/>
+                <a:spcPts val="1200"/>
               </a:spcAft>
               <a:buSzPct val="100000"/>
               <a:buChar char="✓"/>
             </a:pPr>
             <a:r>
-              <a:rPr lang="en-US" sz="1700" dirty="0">
+              <a:rPr lang="en-US" sz="2000" dirty="0">
                 <a:solidFill>
                   <a:srgbClr val="141B26"/>
                 </a:solidFill>
               </a:rPr>
               <a:t>DNA is in the chromosomes in the nucleus; each chromosome is one long DNA molecule; genes are sections of DNA that carry genetic information.</a:t>
             </a:r>
-            <a:endParaRPr lang="en-US" sz="1700" dirty="0"/>
+            <a:endParaRPr lang="en-US" sz="2000" dirty="0"/>
           </a:p>
           <a:p>
             <a:pPr marL="342900" indent="-342900">
               <a:spcAft>
-                <a:spcPts val="1000"/>
+                <a:spcPts val="1200"/>
               </a:spcAft>
               <a:buSzPct val="100000"/>
               <a:buChar char="✓"/>
             </a:pPr>
             <a:r>
-              <a:rPr lang="en-US" sz="1700" dirty="0">
+              <a:rPr lang="en-US" sz="2000" dirty="0">
                 <a:solidFill>
                   <a:srgbClr val="141B26"/>
                 </a:solidFill>
               </a:rPr>
               <a:t>Human body cells have 23 pairs (46) of chromosomes; gametes have 23; a zygote has 46.</a:t>
             </a:r>
-            <a:endParaRPr lang="en-US" sz="1700" dirty="0"/>
+            <a:endParaRPr lang="en-US" sz="2000" dirty="0"/>
           </a:p>
           <a:p>
             <a:pPr marL="342900" indent="-342900">
               <a:spcAft>
-                <a:spcPts val="1000"/>
+                <a:spcPts val="1200"/>
               </a:spcAft>
               <a:buSzPct val="100000"/>
               <a:buChar char="✓"/>
             </a:pPr>
             <a:r>
-              <a:rPr lang="en-US" sz="1700" dirty="0">
+              <a:rPr lang="en-US" sz="2000" dirty="0">
                 <a:solidFill>
                   <a:srgbClr val="141B26"/>
                 </a:solidFill>
               </a:rPr>
               <a:t>The sex chromosomes are XX in females and XY in males.</a:t>
             </a:r>
-            <a:endParaRPr lang="en-US" sz="1700" dirty="0"/>
+            <a:endParaRPr lang="en-US" sz="2000" dirty="0"/>
           </a:p>
         </p:txBody>
       </p:sp>
@@ -4609,7 +4589,7 @@
               <a:buNone/>
             </a:pPr>
             <a:r>
-              <a:rPr lang="en-US" sz="1300" b="1" dirty="0">
+              <a:rPr lang="en-US" sz="1400" b="1" dirty="0">
                 <a:solidFill>
                   <a:srgbClr val="7B3A8E"/>
                 </a:solidFill>
@@ -4620,14 +4600,14 @@
               <a:buNone/>
             </a:pPr>
             <a:r>
-              <a:rPr lang="en-US" sz="1300" dirty="0">
+              <a:rPr lang="en-US" sz="1400" dirty="0">
                 <a:solidFill>
                   <a:srgbClr val="141B26"/>
                 </a:solidFill>
               </a:rPr>
               <a:t>Genetic counselling: how genetic tests work and how a counsellor explains probabilities to a family.</a:t>
             </a:r>
-            <a:endParaRPr lang="en-US" sz="1300" dirty="0"/>
+            <a:endParaRPr lang="en-US" sz="1400" dirty="0"/>
           </a:p>
         </p:txBody>
       </p:sp>
@@ -4895,77 +4875,75 @@
           <a:ln/>
         </p:spPr>
         <p:txBody>
-          <a:bodyPr wrap="square" lIns="0" tIns="0" rIns="0" bIns="0" rtlCol="0" anchor="t">
-            <a:normAutofit/>
-          </a:bodyPr>
+          <a:bodyPr wrap="square" lIns="0" tIns="0" rIns="0" bIns="0" rtlCol="0" anchor="t"/>
           <a:lstStyle/>
           <a:p>
             <a:pPr indent="0" marL="0">
               <a:spcAft>
-                <a:spcPts val="1000"/>
+                <a:spcPts val="1200"/>
               </a:spcAft>
               <a:buNone/>
             </a:pPr>
             <a:r>
-              <a:rPr lang="en-US" sz="2000" dirty="0">
+              <a:rPr lang="en-US" sz="2400" dirty="0">
                 <a:solidFill>
                   <a:srgbClr val="141B26"/>
                 </a:solidFill>
               </a:rPr>
               <a:t>28 February 1953, Cambridge. Two men interrupt people eating lunch: 'We have discovered the secret of life!'</a:t>
             </a:r>
-            <a:endParaRPr lang="en-US" sz="2000" dirty="0"/>
+            <a:endParaRPr lang="en-US" sz="2400" dirty="0"/>
           </a:p>
           <a:p>
             <a:pPr indent="0" marL="0">
               <a:spcAft>
-                <a:spcPts val="1000"/>
+                <a:spcPts val="1200"/>
               </a:spcAft>
               <a:buNone/>
             </a:pPr>
             <a:r>
-              <a:rPr lang="en-US" sz="2000" dirty="0">
+              <a:rPr lang="en-US" sz="2400" dirty="0">
                 <a:solidFill>
                   <a:srgbClr val="141B26"/>
                 </a:solidFill>
               </a:rPr>
               <a:t>1. What do you think they had discovered?</a:t>
             </a:r>
-            <a:endParaRPr lang="en-US" sz="2000" dirty="0"/>
+            <a:endParaRPr lang="en-US" sz="2400" dirty="0"/>
           </a:p>
           <a:p>
             <a:pPr indent="0" marL="0">
               <a:spcAft>
-                <a:spcPts val="1000"/>
+                <a:spcPts val="1200"/>
               </a:spcAft>
               <a:buNone/>
             </a:pPr>
             <a:r>
-              <a:rPr lang="en-US" sz="2000" dirty="0">
+              <a:rPr lang="en-US" sz="2400" dirty="0">
                 <a:solidFill>
                   <a:srgbClr val="141B26"/>
                 </a:solidFill>
               </a:rPr>
               <a:t>2. Where in a cell is genetic information stored?</a:t>
             </a:r>
-            <a:endParaRPr lang="en-US" sz="2000" dirty="0"/>
+            <a:endParaRPr lang="en-US" sz="2400" dirty="0"/>
           </a:p>
           <a:p>
             <a:pPr indent="0" marL="0">
               <a:spcAft>
-                <a:spcPts val="1000"/>
+                <a:spcPts val="1200"/>
               </a:spcAft>
               <a:buNone/>
             </a:pPr>
             <a:r>
-              <a:rPr lang="en-US" sz="2000" dirty="0">
+              <a:rPr lang="en-US" sz="2400" dirty="0">
                 <a:solidFill>
                   <a:srgbClr val="141B26"/>
                 </a:solidFill>
               </a:rPr>
               <a:t>3. Guess: how many chromosomes are in one human body cell?</a:t>
             </a:r>
-            <a:endParaRPr lang="en-US" sz="2000" dirty="0"/>
+            <a:endParaRPr lang="en-US" sz="2400" dirty="0"/>
           </a:p>
         </p:txBody>
       </p:sp>
@@ -5148,8 +5126,8 @@
         </p:nvSpPr>
         <p:spPr>
           <a:xfrm>
-            <a:off x="548640" y="1325880"/>
-            <a:ext cx="5669280" cy="457200"/>
+            <a:off x="548640" y="1280160"/>
+            <a:ext cx="5486400" cy="411480"/>
           </a:xfrm>
           <a:prstGeom prst="rect">
             <a:avLst/>
@@ -5165,14 +5143,14 @@
               <a:buNone/>
             </a:pPr>
             <a:r>
-              <a:rPr lang="en-US" sz="2000" b="1" dirty="0">
+              <a:rPr lang="en-US" sz="2200" b="1" dirty="0">
                 <a:solidFill>
                   <a:srgbClr val="7B3A8E"/>
                 </a:solidFill>
               </a:rPr>
               <a:t>Today I can ...</a:t>
             </a:r>
-            <a:endParaRPr lang="en-US" sz="2000" dirty="0"/>
+            <a:endParaRPr lang="en-US" sz="2200" dirty="0"/>
           </a:p>
         </p:txBody>
       </p:sp>
@@ -5184,8 +5162,8 @@
         </p:nvSpPr>
         <p:spPr>
           <a:xfrm>
-            <a:off x="594360" y="1947672"/>
-            <a:ext cx="292608" cy="292608"/>
+            <a:off x="594360" y="1810512"/>
+            <a:ext cx="310896" cy="310896"/>
           </a:xfrm>
           <a:prstGeom prst="rect">
             <a:avLst/>
@@ -5209,8 +5187,8 @@
         </p:nvSpPr>
         <p:spPr>
           <a:xfrm>
-            <a:off x="1051560" y="1874520"/>
-            <a:ext cx="5120640" cy="868680"/>
+            <a:off x="1097280" y="1737360"/>
+            <a:ext cx="10332720" cy="868680"/>
           </a:xfrm>
           <a:prstGeom prst="rect">
             <a:avLst/>
@@ -5219,23 +5197,21 @@
           <a:ln/>
         </p:spPr>
         <p:txBody>
-          <a:bodyPr wrap="square" lIns="0" tIns="0" rIns="0" bIns="0" rtlCol="0" anchor="t">
-            <a:normAutofit/>
-          </a:bodyPr>
+          <a:bodyPr wrap="square" lIns="0" tIns="0" rIns="0" bIns="0" rtlCol="0" anchor="t"/>
           <a:lstStyle/>
           <a:p>
             <a:pPr indent="0" marL="0">
               <a:buNone/>
             </a:pPr>
             <a:r>
-              <a:rPr lang="en-US" sz="1600" dirty="0">
+              <a:rPr lang="en-US" sz="2000" dirty="0">
                 <a:solidFill>
                   <a:srgbClr val="141B26"/>
                 </a:solidFill>
               </a:rPr>
               <a:t>I can outline how the structure of DNA was discovered and say what each scientist did.</a:t>
             </a:r>
-            <a:endParaRPr lang="en-US" sz="1600" dirty="0"/>
+            <a:endParaRPr lang="en-US" sz="2000" dirty="0"/>
           </a:p>
         </p:txBody>
       </p:sp>
@@ -5247,8 +5223,8 @@
         </p:nvSpPr>
         <p:spPr>
           <a:xfrm>
-            <a:off x="594360" y="2907792"/>
-            <a:ext cx="292608" cy="292608"/>
+            <a:off x="594360" y="2679192"/>
+            <a:ext cx="310896" cy="310896"/>
           </a:xfrm>
           <a:prstGeom prst="rect">
             <a:avLst/>
@@ -5272,8 +5248,8 @@
         </p:nvSpPr>
         <p:spPr>
           <a:xfrm>
-            <a:off x="1051560" y="2834640"/>
-            <a:ext cx="5120640" cy="868680"/>
+            <a:off x="1097280" y="2606040"/>
+            <a:ext cx="10332720" cy="868680"/>
           </a:xfrm>
           <a:prstGeom prst="rect">
             <a:avLst/>
@@ -5282,23 +5258,21 @@
           <a:ln/>
         </p:spPr>
         <p:txBody>
-          <a:bodyPr wrap="square" lIns="0" tIns="0" rIns="0" bIns="0" rtlCol="0" anchor="t">
-            <a:normAutofit/>
-          </a:bodyPr>
+          <a:bodyPr wrap="square" lIns="0" tIns="0" rIns="0" bIns="0" rtlCol="0" anchor="t"/>
           <a:lstStyle/>
           <a:p>
             <a:pPr indent="0" marL="0">
               <a:buNone/>
             </a:pPr>
             <a:r>
-              <a:rPr lang="en-US" sz="1600" dirty="0">
+              <a:rPr lang="en-US" sz="2000" dirty="0">
                 <a:solidFill>
                   <a:srgbClr val="141B26"/>
                 </a:solidFill>
               </a:rPr>
               <a:t>I can describe how DNA, chromosomes, genes and genetic information are linked, and give the number of chromosomes in body cells and gametes.</a:t>
             </a:r>
-            <a:endParaRPr lang="en-US" sz="1600" dirty="0"/>
+            <a:endParaRPr lang="en-US" sz="2000" dirty="0"/>
           </a:p>
         </p:txBody>
       </p:sp>
@@ -5310,8 +5284,8 @@
         </p:nvSpPr>
         <p:spPr>
           <a:xfrm>
-            <a:off x="6583680" y="1325880"/>
-            <a:ext cx="5029200" cy="457200"/>
+            <a:off x="548640" y="3611880"/>
+            <a:ext cx="5486400" cy="411480"/>
           </a:xfrm>
           <a:prstGeom prst="rect">
             <a:avLst/>
@@ -5327,14 +5301,14 @@
               <a:buNone/>
             </a:pPr>
             <a:r>
-              <a:rPr lang="en-US" sz="2000" b="1" dirty="0">
+              <a:rPr lang="en-US" sz="2200" b="1" dirty="0">
                 <a:solidFill>
                   <a:srgbClr val="7B3A8E"/>
                 </a:solidFill>
               </a:rPr>
               <a:t>Key words today</a:t>
             </a:r>
-            <a:endParaRPr lang="en-US" sz="2000" dirty="0"/>
+            <a:endParaRPr lang="en-US" sz="2200" dirty="0"/>
           </a:p>
         </p:txBody>
       </p:sp>
@@ -5346,8 +5320,8 @@
         </p:nvSpPr>
         <p:spPr>
           <a:xfrm>
-            <a:off x="6583680" y="1874520"/>
-            <a:ext cx="5029200" cy="4023360"/>
+            <a:off x="548640" y="4069080"/>
+            <a:ext cx="3515258" cy="1920240"/>
           </a:xfrm>
           <a:prstGeom prst="rect">
             <a:avLst/>
@@ -5356,350 +5330,285 @@
           <a:ln/>
         </p:spPr>
         <p:txBody>
-          <a:bodyPr wrap="square" lIns="0" tIns="0" rIns="0" bIns="0" rtlCol="0" anchor="t">
-            <a:normAutofit/>
-          </a:bodyPr>
+          <a:bodyPr wrap="square" lIns="0" tIns="0" rIns="0" bIns="0" rtlCol="0" anchor="t"/>
+          <a:lstStyle/>
+          <a:p>
+            <a:pPr marL="304800" indent="-304800">
+              <a:spcAft>
+                <a:spcPts val="600"/>
+              </a:spcAft>
+              <a:buSzPct val="100000"/>
+              <a:buChar char="•"/>
+            </a:pPr>
+            <a:r>
+              <a:rPr lang="en-US" sz="2100" b="1" dirty="0">
+                <a:solidFill>
+                  <a:srgbClr val="0F2A5F"/>
+                </a:solidFill>
+              </a:rPr>
+              <a:t>DNA</a:t>
+            </a:r>
+            <a:endParaRPr lang="en-US" sz="2100" dirty="0"/>
+          </a:p>
+          <a:p>
+            <a:pPr marL="304800" indent="-304800">
+              <a:spcAft>
+                <a:spcPts val="600"/>
+              </a:spcAft>
+              <a:buSzPct val="100000"/>
+              <a:buChar char="•"/>
+            </a:pPr>
+            <a:r>
+              <a:rPr lang="en-US" sz="2100" b="1" dirty="0">
+                <a:solidFill>
+                  <a:srgbClr val="0F2A5F"/>
+                </a:solidFill>
+              </a:rPr>
+              <a:t>double helix</a:t>
+            </a:r>
+            <a:endParaRPr lang="en-US" sz="2100" dirty="0"/>
+          </a:p>
+          <a:p>
+            <a:pPr marL="304800" indent="-304800">
+              <a:spcAft>
+                <a:spcPts val="600"/>
+              </a:spcAft>
+              <a:buSzPct val="100000"/>
+              <a:buChar char="•"/>
+            </a:pPr>
+            <a:r>
+              <a:rPr lang="en-US" sz="2100" b="1" dirty="0">
+                <a:solidFill>
+                  <a:srgbClr val="0F2A5F"/>
+                </a:solidFill>
+              </a:rPr>
+              <a:t>chromosome</a:t>
+            </a:r>
+            <a:endParaRPr lang="en-US" sz="2100" dirty="0"/>
+          </a:p>
+          <a:p>
+            <a:pPr marL="304800" indent="-304800">
+              <a:spcAft>
+                <a:spcPts val="600"/>
+              </a:spcAft>
+              <a:buSzPct val="100000"/>
+              <a:buChar char="•"/>
+            </a:pPr>
+            <a:r>
+              <a:rPr lang="en-US" sz="2100" b="1" dirty="0">
+                <a:solidFill>
+                  <a:srgbClr val="0F2A5F"/>
+                </a:solidFill>
+              </a:rPr>
+              <a:t>gene</a:t>
+            </a:r>
+            <a:endParaRPr lang="en-US" sz="2100" dirty="0"/>
+          </a:p>
+        </p:txBody>
+      </p:sp>
+      <p:sp>
+        <p:nvSpPr>
+          <p:cNvPr id="12" name="Text 10"/>
+          <p:cNvSpPr txBox="1"/>
+          <p:nvPr/>
+        </p:nvSpPr>
+        <p:spPr>
+          <a:xfrm>
+            <a:off x="4338218" y="4069080"/>
+            <a:ext cx="3515258" cy="1920240"/>
+          </a:xfrm>
+          <a:prstGeom prst="rect">
+            <a:avLst/>
+          </a:prstGeom>
+          <a:noFill/>
+          <a:ln/>
+        </p:spPr>
+        <p:txBody>
+          <a:bodyPr wrap="square" lIns="0" tIns="0" rIns="0" bIns="0" rtlCol="0" anchor="t"/>
+          <a:lstStyle/>
+          <a:p>
+            <a:pPr marL="304800" indent="-304800">
+              <a:spcAft>
+                <a:spcPts val="600"/>
+              </a:spcAft>
+              <a:buSzPct val="100000"/>
+              <a:buChar char="•"/>
+            </a:pPr>
+            <a:r>
+              <a:rPr lang="en-US" sz="2100" b="1" dirty="0">
+                <a:solidFill>
+                  <a:srgbClr val="0F2A5F"/>
+                </a:solidFill>
+              </a:rPr>
+              <a:t>genetic information</a:t>
+            </a:r>
+            <a:endParaRPr lang="en-US" sz="2100" dirty="0"/>
+          </a:p>
+          <a:p>
+            <a:pPr marL="304800" indent="-304800">
+              <a:spcAft>
+                <a:spcPts val="600"/>
+              </a:spcAft>
+              <a:buSzPct val="100000"/>
+              <a:buChar char="•"/>
+            </a:pPr>
+            <a:r>
+              <a:rPr lang="en-US" sz="2100" b="1" dirty="0">
+                <a:solidFill>
+                  <a:srgbClr val="0F2A5F"/>
+                </a:solidFill>
+              </a:rPr>
+              <a:t>nucleus</a:t>
+            </a:r>
+            <a:endParaRPr lang="en-US" sz="2100" dirty="0"/>
+          </a:p>
+          <a:p>
+            <a:pPr marL="304800" indent="-304800">
+              <a:spcAft>
+                <a:spcPts val="600"/>
+              </a:spcAft>
+              <a:buSzPct val="100000"/>
+              <a:buChar char="•"/>
+            </a:pPr>
+            <a:r>
+              <a:rPr lang="en-US" sz="2100" b="1" dirty="0">
+                <a:solidFill>
+                  <a:srgbClr val="0F2A5F"/>
+                </a:solidFill>
+              </a:rPr>
+              <a:t>sex chromosomes</a:t>
+            </a:r>
+            <a:endParaRPr lang="en-US" sz="2100" dirty="0"/>
+          </a:p>
+          <a:p>
+            <a:pPr marL="304800" indent="-304800">
+              <a:spcAft>
+                <a:spcPts val="600"/>
+              </a:spcAft>
+              <a:buSzPct val="100000"/>
+              <a:buChar char="•"/>
+            </a:pPr>
+            <a:r>
+              <a:rPr lang="en-US" sz="2100" b="1" dirty="0">
+                <a:solidFill>
+                  <a:srgbClr val="0F2A5F"/>
+                </a:solidFill>
+              </a:rPr>
+              <a:t>gamete</a:t>
+            </a:r>
+            <a:endParaRPr lang="en-US" sz="2100" dirty="0"/>
+          </a:p>
+        </p:txBody>
+      </p:sp>
+      <p:sp>
+        <p:nvSpPr>
+          <p:cNvPr id="13" name="Text 11"/>
+          <p:cNvSpPr txBox="1"/>
+          <p:nvPr/>
+        </p:nvSpPr>
+        <p:spPr>
+          <a:xfrm>
+            <a:off x="8127797" y="4069080"/>
+            <a:ext cx="3515258" cy="1920240"/>
+          </a:xfrm>
+          <a:prstGeom prst="rect">
+            <a:avLst/>
+          </a:prstGeom>
+          <a:noFill/>
+          <a:ln/>
+        </p:spPr>
+        <p:txBody>
+          <a:bodyPr wrap="square" lIns="0" tIns="0" rIns="0" bIns="0" rtlCol="0" anchor="t"/>
+          <a:lstStyle/>
+          <a:p>
+            <a:pPr marL="304800" indent="-304800">
+              <a:spcAft>
+                <a:spcPts val="600"/>
+              </a:spcAft>
+              <a:buSzPct val="100000"/>
+              <a:buChar char="•"/>
+            </a:pPr>
+            <a:r>
+              <a:rPr lang="en-US" sz="2200" b="1" dirty="0">
+                <a:solidFill>
+                  <a:srgbClr val="0F2A5F"/>
+                </a:solidFill>
+              </a:rPr>
+              <a:t>zygote</a:t>
+            </a:r>
+            <a:endParaRPr lang="en-US" sz="2200" dirty="0"/>
+          </a:p>
+          <a:p>
+            <a:pPr marL="304800" indent="-304800">
+              <a:spcAft>
+                <a:spcPts val="600"/>
+              </a:spcAft>
+              <a:buSzPct val="100000"/>
+              <a:buChar char="•"/>
+            </a:pPr>
+            <a:r>
+              <a:rPr lang="en-US" sz="2200" b="1" dirty="0">
+                <a:solidFill>
+                  <a:srgbClr val="0F2A5F"/>
+                </a:solidFill>
+              </a:rPr>
+              <a:t>X-ray</a:t>
+            </a:r>
+            <a:endParaRPr lang="en-US" sz="2200" dirty="0"/>
+          </a:p>
+          <a:p>
+            <a:pPr marL="304800" indent="-304800">
+              <a:spcAft>
+                <a:spcPts val="600"/>
+              </a:spcAft>
+              <a:buSzPct val="100000"/>
+              <a:buChar char="•"/>
+            </a:pPr>
+            <a:r>
+              <a:rPr lang="en-US" sz="2200" b="1" dirty="0">
+                <a:solidFill>
+                  <a:srgbClr val="0F2A5F"/>
+                </a:solidFill>
+              </a:rPr>
+              <a:t>model</a:t>
+            </a:r>
+            <a:endParaRPr lang="en-US" sz="2200" dirty="0"/>
+          </a:p>
+        </p:txBody>
+      </p:sp>
+      <p:sp>
+        <p:nvSpPr>
+          <p:cNvPr id="14" name="Text 12"/>
+          <p:cNvSpPr txBox="1"/>
+          <p:nvPr/>
+        </p:nvSpPr>
+        <p:spPr>
+          <a:xfrm>
+            <a:off x="548640" y="6035040"/>
+            <a:ext cx="10881360" cy="320040"/>
+          </a:xfrm>
+          <a:prstGeom prst="rect">
+            <a:avLst/>
+          </a:prstGeom>
+          <a:noFill/>
+          <a:ln/>
+        </p:spPr>
+        <p:txBody>
+          <a:bodyPr wrap="square" lIns="0" tIns="0" rIns="0" bIns="0" rtlCol="0" anchor="ctr"/>
           <a:lstStyle/>
           <a:p>
             <a:pPr indent="0" marL="0">
-              <a:spcAft>
-                <a:spcPts val="500"/>
-              </a:spcAft>
-              <a:buNone/>
-            </a:pPr>
-            <a:r>
-              <a:rPr lang="en-US" sz="1300" b="1" dirty="0">
-                <a:solidFill>
-                  <a:srgbClr val="0F2A5F"/>
-                </a:solidFill>
-              </a:rPr>
-              <a:t>DNA</a:t>
-            </a:r>
-            <a:pPr indent="0" marL="0">
-              <a:spcAft>
-                <a:spcPts val="500"/>
-              </a:spcAft>
-              <a:buNone/>
-            </a:pPr>
-            <a:r>
-              <a:rPr lang="en-US" sz="1300" dirty="0">
-                <a:solidFill>
-                  <a:srgbClr val="141B26"/>
-                </a:solidFill>
-              </a:rPr>
-              <a:t>  the very long molecule that stores genetic information</a:t>
-            </a:r>
-            <a:endParaRPr lang="en-US" sz="1300" dirty="0"/>
-          </a:p>
-          <a:p>
-            <a:pPr indent="0" marL="0">
-              <a:spcAft>
-                <a:spcPts val="500"/>
-              </a:spcAft>
-              <a:buNone/>
-            </a:pPr>
-            <a:r>
-              <a:rPr lang="en-US" sz="1300" b="1" dirty="0">
-                <a:solidFill>
-                  <a:srgbClr val="0F2A5F"/>
-                </a:solidFill>
-              </a:rPr>
-              <a:t>double helix</a:t>
-            </a:r>
-            <a:pPr indent="0" marL="0">
-              <a:spcAft>
-                <a:spcPts val="500"/>
-              </a:spcAft>
-              <a:buNone/>
-            </a:pPr>
-            <a:r>
-              <a:rPr lang="en-US" sz="1300" dirty="0">
-                <a:solidFill>
-                  <a:srgbClr val="141B26"/>
-                </a:solidFill>
-              </a:rPr>
-              <a:t>  the shape of a DNA molecule: two strands twisted into a spiral</a:t>
-            </a:r>
-            <a:endParaRPr lang="en-US" sz="1300" dirty="0"/>
-          </a:p>
-          <a:p>
-            <a:pPr indent="0" marL="0">
-              <a:spcAft>
-                <a:spcPts val="500"/>
-              </a:spcAft>
-              <a:buNone/>
-            </a:pPr>
-            <a:r>
-              <a:rPr lang="en-US" sz="1300" b="1" dirty="0">
-                <a:solidFill>
-                  <a:srgbClr val="0F2A5F"/>
-                </a:solidFill>
-              </a:rPr>
-              <a:t>chromosome</a:t>
-            </a:r>
-            <a:pPr indent="0" marL="0">
-              <a:spcAft>
-                <a:spcPts val="500"/>
-              </a:spcAft>
-              <a:buNone/>
-            </a:pPr>
-            <a:r>
-              <a:rPr lang="en-US" sz="1300" dirty="0">
-                <a:solidFill>
-                  <a:srgbClr val="141B26"/>
-                </a:solidFill>
-              </a:rPr>
-              <a:t>  a structure in the nucleus made of one long DNA molecule</a:t>
-            </a:r>
-            <a:endParaRPr lang="en-US" sz="1300" dirty="0"/>
-          </a:p>
-          <a:p>
-            <a:pPr indent="0" marL="0">
-              <a:spcAft>
-                <a:spcPts val="500"/>
-              </a:spcAft>
-              <a:buNone/>
-            </a:pPr>
-            <a:r>
-              <a:rPr lang="en-US" sz="1300" b="1" dirty="0">
-                <a:solidFill>
-                  <a:srgbClr val="0F2A5F"/>
-                </a:solidFill>
-              </a:rPr>
-              <a:t>gene</a:t>
-            </a:r>
-            <a:pPr indent="0" marL="0">
-              <a:spcAft>
-                <a:spcPts val="500"/>
-              </a:spcAft>
-              <a:buNone/>
-            </a:pPr>
-            <a:r>
-              <a:rPr lang="en-US" sz="1300" dirty="0">
-                <a:solidFill>
-                  <a:srgbClr val="141B26"/>
-                </a:solidFill>
-              </a:rPr>
-              <a:t>  a section of DNA that carries the instructions for one characteristic</a:t>
-            </a:r>
-            <a:endParaRPr lang="en-US" sz="1300" dirty="0"/>
-          </a:p>
-          <a:p>
-            <a:pPr indent="0" marL="0">
-              <a:spcAft>
-                <a:spcPts val="500"/>
-              </a:spcAft>
-              <a:buNone/>
-            </a:pPr>
-            <a:r>
-              <a:rPr lang="en-US" sz="1300" b="1" dirty="0">
-                <a:solidFill>
-                  <a:srgbClr val="0F2A5F"/>
-                </a:solidFill>
-              </a:rPr>
-              <a:t>genetic information</a:t>
-            </a:r>
-            <a:pPr indent="0" marL="0">
-              <a:spcAft>
-                <a:spcPts val="500"/>
-              </a:spcAft>
-              <a:buNone/>
-            </a:pPr>
-            <a:r>
-              <a:rPr lang="en-US" sz="1300" dirty="0">
-                <a:solidFill>
-                  <a:srgbClr val="141B26"/>
-                </a:solidFill>
-              </a:rPr>
-              <a:t>  the instructions for inherited characteristics</a:t>
-            </a:r>
-            <a:endParaRPr lang="en-US" sz="1300" dirty="0"/>
-          </a:p>
-          <a:p>
-            <a:pPr indent="0" marL="0">
-              <a:spcAft>
-                <a:spcPts val="500"/>
-              </a:spcAft>
-              <a:buNone/>
-            </a:pPr>
-            <a:r>
-              <a:rPr lang="en-US" sz="1300" b="1" dirty="0">
-                <a:solidFill>
-                  <a:srgbClr val="0F2A5F"/>
-                </a:solidFill>
-              </a:rPr>
-              <a:t>nucleus</a:t>
-            </a:r>
-            <a:pPr indent="0" marL="0">
-              <a:spcAft>
-                <a:spcPts val="500"/>
-              </a:spcAft>
-              <a:buNone/>
-            </a:pPr>
-            <a:r>
-              <a:rPr lang="en-US" sz="1300" dirty="0">
-                <a:solidFill>
-                  <a:srgbClr val="141B26"/>
-                </a:solidFill>
-              </a:rPr>
-              <a:t>  the part of a cell that contains the chromosomes</a:t>
-            </a:r>
-            <a:endParaRPr lang="en-US" sz="1300" dirty="0"/>
-          </a:p>
-          <a:p>
-            <a:pPr indent="0" marL="0">
-              <a:spcAft>
-                <a:spcPts val="500"/>
-              </a:spcAft>
-              <a:buNone/>
-            </a:pPr>
-            <a:r>
-              <a:rPr lang="en-US" sz="1300" b="1" dirty="0">
-                <a:solidFill>
-                  <a:srgbClr val="0F2A5F"/>
-                </a:solidFill>
-              </a:rPr>
-              <a:t>sex chromosomes</a:t>
-            </a:r>
-            <a:pPr indent="0" marL="0">
-              <a:spcAft>
-                <a:spcPts val="500"/>
-              </a:spcAft>
-              <a:buNone/>
-            </a:pPr>
-            <a:r>
-              <a:rPr lang="en-US" sz="1300" dirty="0">
-                <a:solidFill>
-                  <a:srgbClr val="141B26"/>
-                </a:solidFill>
-              </a:rPr>
-              <a:t>  the pair of chromosomes that decides sex: XX (female) or XY (male)</a:t>
-            </a:r>
-            <a:endParaRPr lang="en-US" sz="1300" dirty="0"/>
-          </a:p>
-          <a:p>
-            <a:pPr indent="0" marL="0">
-              <a:spcAft>
-                <a:spcPts val="500"/>
-              </a:spcAft>
-              <a:buNone/>
-            </a:pPr>
-            <a:r>
-              <a:rPr lang="en-US" sz="1300" b="1" dirty="0">
-                <a:solidFill>
-                  <a:srgbClr val="0F2A5F"/>
-                </a:solidFill>
-              </a:rPr>
-              <a:t>gamete</a:t>
-            </a:r>
-            <a:pPr indent="0" marL="0">
-              <a:spcAft>
-                <a:spcPts val="500"/>
-              </a:spcAft>
-              <a:buNone/>
-            </a:pPr>
-            <a:r>
-              <a:rPr lang="en-US" sz="1300" dirty="0">
-                <a:solidFill>
-                  <a:srgbClr val="141B26"/>
-                </a:solidFill>
-              </a:rPr>
-              <a:t>  a sex cell (sperm or egg) with 23 chromosomes</a:t>
-            </a:r>
-            <a:endParaRPr lang="en-US" sz="1300" dirty="0"/>
-          </a:p>
-          <a:p>
-            <a:pPr indent="0" marL="0">
-              <a:spcAft>
-                <a:spcPts val="500"/>
-              </a:spcAft>
-              <a:buNone/>
-            </a:pPr>
-            <a:r>
-              <a:rPr lang="en-US" sz="1300" b="1" dirty="0">
-                <a:solidFill>
-                  <a:srgbClr val="0F2A5F"/>
-                </a:solidFill>
-              </a:rPr>
-              <a:t>zygote</a:t>
-            </a:r>
-            <a:pPr indent="0" marL="0">
-              <a:spcAft>
-                <a:spcPts val="500"/>
-              </a:spcAft>
-              <a:buNone/>
-            </a:pPr>
-            <a:r>
-              <a:rPr lang="en-US" sz="1300" dirty="0">
-                <a:solidFill>
-                  <a:srgbClr val="141B26"/>
-                </a:solidFill>
-              </a:rPr>
-              <a:t>  the fertilised egg cell, with 46 chromosomes</a:t>
-            </a:r>
-            <a:endParaRPr lang="en-US" sz="1300" dirty="0"/>
-          </a:p>
-          <a:p>
-            <a:pPr indent="0" marL="0">
-              <a:spcAft>
-                <a:spcPts val="500"/>
-              </a:spcAft>
-              <a:buNone/>
-            </a:pPr>
-            <a:r>
-              <a:rPr lang="en-US" sz="1300" b="1" dirty="0">
-                <a:solidFill>
-                  <a:srgbClr val="0F2A5F"/>
-                </a:solidFill>
-              </a:rPr>
-              <a:t>X-ray</a:t>
-            </a:r>
-            <a:pPr indent="0" marL="0">
-              <a:spcAft>
-                <a:spcPts val="500"/>
-              </a:spcAft>
-              <a:buNone/>
-            </a:pPr>
-            <a:r>
-              <a:rPr lang="en-US" sz="1300" dirty="0">
-                <a:solidFill>
-                  <a:srgbClr val="141B26"/>
-                </a:solidFill>
-              </a:rPr>
-              <a:t>  a type of radiation used to make images, including of molecules</a:t>
-            </a:r>
-            <a:endParaRPr lang="en-US" sz="1300" dirty="0"/>
-          </a:p>
-          <a:p>
-            <a:pPr indent="0" marL="0">
-              <a:spcAft>
-                <a:spcPts val="500"/>
-              </a:spcAft>
-              <a:buNone/>
-            </a:pPr>
-            <a:r>
-              <a:rPr lang="en-US" sz="1300" b="1" dirty="0">
-                <a:solidFill>
-                  <a:srgbClr val="0F2A5F"/>
-                </a:solidFill>
-              </a:rPr>
-              <a:t>model</a:t>
-            </a:r>
-            <a:pPr indent="0" marL="0">
-              <a:spcAft>
-                <a:spcPts val="500"/>
-              </a:spcAft>
-              <a:buNone/>
-            </a:pPr>
-            <a:r>
-              <a:rPr lang="en-US" sz="1300" dirty="0">
-                <a:solidFill>
-                  <a:srgbClr val="141B26"/>
-                </a:solidFill>
-              </a:rPr>
-              <a:t>  a simpler representation of something that scientists test against evidence</a:t>
-            </a:r>
-            <a:endParaRPr lang="en-US" sz="1300" dirty="0"/>
+              <a:buNone/>
+            </a:pPr>
+            <a:r>
+              <a:rPr lang="en-US" sz="1400" i="1" dirty="0">
+                <a:solidFill>
+                  <a:srgbClr val="5B6574"/>
+                </a:solidFill>
+              </a:rPr>
+              <a:t>Meanings are in the key words box on your worksheet.</a:t>
+            </a:r>
+            <a:endParaRPr lang="en-US" sz="1400" dirty="0"/>
           </a:p>
         </p:txBody>
       </p:sp>
@@ -5883,7 +5792,7 @@
         <p:spPr>
           <a:xfrm>
             <a:off x="548640" y="1371600"/>
-            <a:ext cx="5394960" cy="2377440"/>
+            <a:ext cx="5394960" cy="2651760"/>
           </a:xfrm>
           <a:prstGeom prst="rect">
             <a:avLst/>
@@ -5892,23 +5801,21 @@
           <a:ln/>
         </p:spPr>
         <p:txBody>
-          <a:bodyPr wrap="square" lIns="0" tIns="0" rIns="0" bIns="0" rtlCol="0" anchor="t">
-            <a:normAutofit/>
-          </a:bodyPr>
+          <a:bodyPr wrap="square" lIns="0" tIns="0" rIns="0" bIns="0" rtlCol="0" anchor="t"/>
           <a:lstStyle/>
           <a:p>
             <a:pPr indent="0" marL="0">
               <a:buNone/>
             </a:pPr>
             <a:r>
-              <a:rPr lang="en-US" sz="2800" b="1" dirty="0">
+              <a:rPr lang="en-US" sz="2400" b="1" dirty="0">
                 <a:solidFill>
                   <a:srgbClr val="0F2A5F"/>
                 </a:solidFill>
               </a:rPr>
               <a:t>In 1952 Rosalind Franklin took an X-ray photo of DNA. It looked like a blurry X. When James Watson saw it, he knew at once that DNA must be a spiral. Why was seeing another scientist's data so important?</a:t>
             </a:r>
-            <a:endParaRPr lang="en-US" sz="2800" dirty="0"/>
+            <a:endParaRPr lang="en-US" sz="2400" dirty="0"/>
           </a:p>
         </p:txBody>
       </p:sp>
@@ -5920,8 +5827,8 @@
         </p:nvSpPr>
         <p:spPr>
           <a:xfrm>
-            <a:off x="548640" y="3794760"/>
-            <a:ext cx="5394960" cy="2103120"/>
+            <a:off x="548640" y="4114800"/>
+            <a:ext cx="5394960" cy="1828800"/>
           </a:xfrm>
           <a:prstGeom prst="rect">
             <a:avLst/>
@@ -5930,9 +5837,7 @@
           <a:ln/>
         </p:spPr>
         <p:txBody>
-          <a:bodyPr wrap="square" lIns="0" tIns="0" rIns="0" bIns="0" rtlCol="0" anchor="t">
-            <a:normAutofit/>
-          </a:bodyPr>
+          <a:bodyPr wrap="square" lIns="0" tIns="0" rIns="0" bIns="0" rtlCol="0" anchor="t"/>
           <a:lstStyle/>
           <a:p>
             <a:pPr indent="0" marL="0">
@@ -5942,14 +5847,14 @@
               <a:buNone/>
             </a:pPr>
             <a:r>
-              <a:rPr lang="en-US" sz="1600" dirty="0">
+              <a:rPr lang="en-US" sz="2000" dirty="0">
                 <a:solidFill>
                   <a:srgbClr val="141B26"/>
                 </a:solidFill>
               </a:rPr>
               <a:t>Talk to a partner: what could Watson and Crick do with the photo that they could not do without it?</a:t>
             </a:r>
-            <a:endParaRPr lang="en-US" sz="1600" dirty="0"/>
+            <a:endParaRPr lang="en-US" sz="2000" dirty="0"/>
           </a:p>
         </p:txBody>
       </p:sp>
@@ -5986,7 +5891,7 @@
         <p:spPr>
           <a:xfrm>
             <a:off x="6309360" y="5197703"/>
-            <a:ext cx="5303520" cy="502920"/>
+            <a:ext cx="5303520" cy="548640"/>
           </a:xfrm>
           <a:prstGeom prst="rect">
             <a:avLst/>
@@ -6002,7 +5907,7 @@
               <a:buNone/>
             </a:pPr>
             <a:r>
-              <a:rPr lang="en-US" sz="1100" dirty="0">
+              <a:rPr lang="en-US" sz="1300" dirty="0">
                 <a:solidFill>
                   <a:srgbClr val="141B26"/>
                 </a:solidFill>
@@ -6012,21 +5917,21 @@
             <a:pPr algn="l" indent="0" marL="0">
               <a:buNone/>
             </a:pPr>
-            <a:endParaRPr lang="en-US" sz="1100" dirty="0"/>
+            <a:endParaRPr lang="en-US" sz="1300" dirty="0"/>
           </a:p>
           <a:p>
             <a:pPr algn="l" indent="0" marL="0">
               <a:buNone/>
             </a:pPr>
             <a:r>
-              <a:rPr lang="en-US" sz="800" dirty="0">
+              <a:rPr lang="en-US" sz="900" dirty="0">
                 <a:solidFill>
                   <a:srgbClr val="5B6574"/>
                 </a:solidFill>
               </a:rPr>
               <a:t>Image: Ryan Somma, CC BY-SA 2.0, via Wikimedia Commons</a:t>
             </a:r>
-            <a:endParaRPr lang="en-US" sz="1100" dirty="0"/>
+            <a:endParaRPr lang="en-US" sz="1300" dirty="0"/>
           </a:p>
         </p:txBody>
       </p:sp>
@@ -6209,8 +6114,8 @@
         </p:nvSpPr>
         <p:spPr>
           <a:xfrm>
-            <a:off x="548640" y="6053328"/>
-            <a:ext cx="9601200" cy="292608"/>
+            <a:off x="548640" y="6035040"/>
+            <a:ext cx="9601200" cy="310896"/>
           </a:xfrm>
           <a:prstGeom prst="rect">
             <a:avLst/>
@@ -6226,7 +6131,7 @@
               <a:buNone/>
             </a:pPr>
             <a:r>
-              <a:rPr lang="en-US" sz="1200" b="1" dirty="0">
+              <a:rPr lang="en-US" sz="1400" b="1" dirty="0">
                 <a:solidFill>
                   <a:srgbClr val="7B3A8E"/>
                 </a:solidFill>
@@ -6237,14 +6142,14 @@
               <a:buNone/>
             </a:pPr>
             <a:r>
-              <a:rPr lang="en-US" sz="1200" dirty="0">
+              <a:rPr lang="en-US" sz="1400" dirty="0">
                 <a:solidFill>
                   <a:srgbClr val="7B3A8E"/>
                 </a:solidFill>
               </a:rPr>
               <a:t>DNA   ·   double helix   ·   X-ray   ·   model</a:t>
             </a:r>
-            <a:endParaRPr lang="en-US" sz="1200" dirty="0"/>
+            <a:endParaRPr lang="en-US" sz="1400" dirty="0"/>
           </a:p>
         </p:txBody>
       </p:sp>
@@ -6266,81 +6171,79 @@
           <a:ln/>
         </p:spPr>
         <p:txBody>
-          <a:bodyPr wrap="square" lIns="0" tIns="0" rIns="0" bIns="0" rtlCol="0" anchor="t">
-            <a:normAutofit/>
-          </a:bodyPr>
-          <a:lstStyle/>
-          <a:p>
-            <a:pPr marL="228600" indent="-228600">
+          <a:bodyPr wrap="square" lIns="0" tIns="0" rIns="0" bIns="0" rtlCol="0" anchor="t"/>
+          <a:lstStyle/>
+          <a:p>
+            <a:pPr marL="304800" indent="-304800">
               <a:spcAft>
-                <a:spcPts val="600"/>
+                <a:spcPts val="800"/>
               </a:spcAft>
               <a:buSzPct val="100000"/>
               <a:buChar char="•"/>
             </a:pPr>
             <a:r>
-              <a:rPr lang="en-US" sz="1700" dirty="0">
+              <a:rPr lang="en-US" sz="2000" dirty="0">
                 <a:solidFill>
                   <a:srgbClr val="141B26"/>
                 </a:solidFill>
               </a:rPr>
               <a:t>Watson and Crick used their own data and other scientists' data to build a model of DNA.</a:t>
             </a:r>
-            <a:endParaRPr lang="en-US" sz="1700" dirty="0"/>
-          </a:p>
-          <a:p>
-            <a:pPr marL="228600" indent="-228600">
+            <a:endParaRPr lang="en-US" sz="2000" dirty="0"/>
+          </a:p>
+          <a:p>
+            <a:pPr marL="304800" indent="-304800">
               <a:spcAft>
-                <a:spcPts val="600"/>
+                <a:spcPts val="800"/>
               </a:spcAft>
               <a:buSzPct val="100000"/>
               <a:buChar char="•"/>
             </a:pPr>
             <a:r>
-              <a:rPr lang="en-US" sz="1700" dirty="0">
+              <a:rPr lang="en-US" sz="2000" dirty="0">
                 <a:solidFill>
                   <a:srgbClr val="141B26"/>
                 </a:solidFill>
               </a:rPr>
               <a:t>Franklin told them their first model was wrong.</a:t>
             </a:r>
-            <a:endParaRPr lang="en-US" sz="1700" dirty="0"/>
-          </a:p>
-          <a:p>
-            <a:pPr marL="228600" indent="-228600">
+            <a:endParaRPr lang="en-US" sz="2000" dirty="0"/>
+          </a:p>
+          <a:p>
+            <a:pPr marL="304800" indent="-304800">
               <a:spcAft>
-                <a:spcPts val="600"/>
+                <a:spcPts val="800"/>
               </a:spcAft>
               <a:buSzPct val="100000"/>
               <a:buChar char="•"/>
             </a:pPr>
             <a:r>
-              <a:rPr lang="en-US" sz="1700" dirty="0">
+              <a:rPr lang="en-US" sz="2000" dirty="0">
                 <a:solidFill>
                   <a:srgbClr val="141B26"/>
                 </a:solidFill>
               </a:rPr>
               <a:t>Franklin and Wilkins took X-ray photos of DNA; Wilkins showed one to Watson in 1953.</a:t>
             </a:r>
-            <a:endParaRPr lang="en-US" sz="1700" dirty="0"/>
-          </a:p>
-          <a:p>
-            <a:pPr marL="228600" indent="-228600">
+            <a:endParaRPr lang="en-US" sz="2000" dirty="0"/>
+          </a:p>
+          <a:p>
+            <a:pPr marL="304800" indent="-304800">
               <a:spcAft>
-                <a:spcPts val="600"/>
+                <a:spcPts val="800"/>
               </a:spcAft>
               <a:buSzPct val="100000"/>
               <a:buChar char="•"/>
             </a:pPr>
             <a:r>
-              <a:rPr lang="en-US" sz="1700" dirty="0">
+              <a:rPr lang="en-US" sz="2000" dirty="0">
                 <a:solidFill>
                   <a:srgbClr val="141B26"/>
                 </a:solidFill>
               </a:rPr>
               <a:t>Watson and Crick published the double helix model in Nature on 25 April 1953. Wilkins then spent years testing and correcting it.</a:t>
             </a:r>
-            <a:endParaRPr lang="en-US" sz="1700" dirty="0"/>
+            <a:endParaRPr lang="en-US" sz="2000" dirty="0"/>
           </a:p>
         </p:txBody>
       </p:sp>
@@ -6377,7 +6280,7 @@
         <p:spPr>
           <a:xfrm>
             <a:off x="6583680" y="4983480"/>
-            <a:ext cx="5029200" cy="502920"/>
+            <a:ext cx="5029200" cy="548640"/>
           </a:xfrm>
           <a:prstGeom prst="rect">
             <a:avLst/>
@@ -6393,7 +6296,7 @@
               <a:buNone/>
             </a:pPr>
             <a:r>
-              <a:rPr lang="en-US" sz="1100" dirty="0">
+              <a:rPr lang="en-US" sz="1300" dirty="0">
                 <a:solidFill>
                   <a:srgbClr val="141B26"/>
                 </a:solidFill>
@@ -6403,21 +6306,21 @@
             <a:pPr algn="l" indent="0" marL="0">
               <a:buNone/>
             </a:pPr>
-            <a:endParaRPr lang="en-US" sz="1100" dirty="0"/>
+            <a:endParaRPr lang="en-US" sz="1300" dirty="0"/>
           </a:p>
           <a:p>
             <a:pPr algn="l" indent="0" marL="0">
               <a:buNone/>
             </a:pPr>
             <a:r>
-              <a:rPr lang="en-US" sz="800" dirty="0">
+              <a:rPr lang="en-US" sz="900" dirty="0">
                 <a:solidFill>
                   <a:srgbClr val="5B6574"/>
                 </a:solidFill>
               </a:rPr>
               <a:t>Image: National Institutes of Health (NIH), Public domain, via Wikimedia Commons</a:t>
             </a:r>
-            <a:endParaRPr lang="en-US" sz="1100" dirty="0"/>
+            <a:endParaRPr lang="en-US" sz="1300" dirty="0"/>
           </a:p>
         </p:txBody>
       </p:sp>
@@ -6464,16 +6367,14 @@
           <a:ln/>
         </p:spPr>
         <p:txBody>
-          <a:bodyPr wrap="square" lIns="0" tIns="0" rIns="0" bIns="0" rtlCol="0" anchor="ctr">
-            <a:normAutofit/>
-          </a:bodyPr>
+          <a:bodyPr wrap="square" lIns="0" tIns="0" rIns="0" bIns="0" rtlCol="0" anchor="ctr"/>
           <a:lstStyle/>
           <a:p>
             <a:pPr indent="0" marL="0">
               <a:buNone/>
             </a:pPr>
             <a:r>
-              <a:rPr lang="en-US" sz="1400" b="1" dirty="0">
+              <a:rPr lang="en-US" sz="1700" b="1" dirty="0">
                 <a:solidFill>
                   <a:srgbClr val="7B3A8E"/>
                 </a:solidFill>
@@ -6484,14 +6385,14 @@
               <a:buNone/>
             </a:pPr>
             <a:r>
-              <a:rPr lang="en-US" sz="1400" dirty="0">
+              <a:rPr lang="en-US" sz="1700" dirty="0">
                 <a:solidFill>
                   <a:srgbClr val="141B26"/>
                 </a:solidFill>
               </a:rPr>
               <a:t>A scientific model is built from evidence, shared, tested and corrected.</a:t>
             </a:r>
-            <a:endParaRPr lang="en-US" sz="1400" dirty="0"/>
+            <a:endParaRPr lang="en-US" sz="1700" dirty="0"/>
           </a:p>
         </p:txBody>
       </p:sp>
@@ -6674,8 +6575,8 @@
         </p:nvSpPr>
         <p:spPr>
           <a:xfrm>
-            <a:off x="548640" y="6053328"/>
-            <a:ext cx="9601200" cy="292608"/>
+            <a:off x="548640" y="6035040"/>
+            <a:ext cx="9601200" cy="310896"/>
           </a:xfrm>
           <a:prstGeom prst="rect">
             <a:avLst/>
@@ -6691,7 +6592,7 @@
               <a:buNone/>
             </a:pPr>
             <a:r>
-              <a:rPr lang="en-US" sz="1200" b="1" dirty="0">
+              <a:rPr lang="en-US" sz="1400" b="1" dirty="0">
                 <a:solidFill>
                   <a:srgbClr val="7B3A8E"/>
                 </a:solidFill>
@@ -6702,14 +6603,14 @@
               <a:buNone/>
             </a:pPr>
             <a:r>
-              <a:rPr lang="en-US" sz="1200" dirty="0">
+              <a:rPr lang="en-US" sz="1400" dirty="0">
                 <a:solidFill>
                   <a:srgbClr val="7B3A8E"/>
                 </a:solidFill>
               </a:rPr>
               <a:t>X-ray   ·   model</a:t>
             </a:r>
-            <a:endParaRPr lang="en-US" sz="1200" dirty="0"/>
+            <a:endParaRPr lang="en-US" sz="1400" dirty="0"/>
           </a:p>
         </p:txBody>
       </p:sp>
@@ -6749,7 +6650,7 @@
                         <a:buNone/>
                       </a:pPr>
                       <a:r>
-                        <a:rPr lang="en-US" sz="1300" b="1" dirty="0">
+                        <a:rPr lang="en-US" sz="1500" b="1" dirty="0">
                           <a:solidFill>
                             <a:srgbClr val="FFFFFF"/>
                           </a:solidFill>
@@ -6759,7 +6660,7 @@
                         </a:rPr>
                         <a:t>Scientist</a:t>
                       </a:r>
-                      <a:endParaRPr lang="en-US" sz="1300" dirty="0">
+                      <a:endParaRPr lang="en-US" sz="1500" dirty="0">
                         <a:latin typeface="Calibri" charset="0"/>
                         <a:ea typeface="Calibri" charset="0"/>
                         <a:cs typeface="Calibri" charset="0"/>
@@ -6817,7 +6718,7 @@
                         <a:buNone/>
                       </a:pPr>
                       <a:r>
-                        <a:rPr lang="en-US" sz="1300" b="1" dirty="0">
+                        <a:rPr lang="en-US" sz="1500" b="1" dirty="0">
                           <a:solidFill>
                             <a:srgbClr val="FFFFFF"/>
                           </a:solidFill>
@@ -6827,7 +6728,7 @@
                         </a:rPr>
                         <a:t>What they did</a:t>
                       </a:r>
-                      <a:endParaRPr lang="en-US" sz="1300" dirty="0">
+                      <a:endParaRPr lang="en-US" sz="1500" dirty="0">
                         <a:latin typeface="Calibri" charset="0"/>
                         <a:ea typeface="Calibri" charset="0"/>
                         <a:cs typeface="Calibri" charset="0"/>
@@ -6887,7 +6788,7 @@
                         <a:buNone/>
                       </a:pPr>
                       <a:r>
-                        <a:rPr lang="en-US" sz="1300" dirty="0">
+                        <a:rPr lang="en-US" sz="1500" dirty="0">
                           <a:solidFill>
                             <a:srgbClr val="141B26"/>
                           </a:solidFill>
@@ -6897,7 +6798,7 @@
                         </a:rPr>
                         <a:t>Rosalind Franklin</a:t>
                       </a:r>
-                      <a:endParaRPr lang="en-US" sz="1300" dirty="0">
+                      <a:endParaRPr lang="en-US" sz="1500" dirty="0">
                         <a:latin typeface="Calibri" charset="0"/>
                         <a:ea typeface="Calibri" charset="0"/>
                         <a:cs typeface="Calibri" charset="0"/>
@@ -6952,7 +6853,7 @@
                         <a:buNone/>
                       </a:pPr>
                       <a:r>
-                        <a:rPr lang="en-US" sz="1300" dirty="0">
+                        <a:rPr lang="en-US" sz="1500" dirty="0">
                           <a:solidFill>
                             <a:srgbClr val="141B26"/>
                           </a:solidFill>
@@ -6962,7 +6863,7 @@
                         </a:rPr>
                         <a:t>Took very clear X-ray photos of DNA; told Watson and Crick their first model was wrong</a:t>
                       </a:r>
-                      <a:endParaRPr lang="en-US" sz="1300" dirty="0">
+                      <a:endParaRPr lang="en-US" sz="1500" dirty="0">
                         <a:latin typeface="Calibri" charset="0"/>
                         <a:ea typeface="Calibri" charset="0"/>
                         <a:cs typeface="Calibri" charset="0"/>
@@ -7019,7 +6920,7 @@
                         <a:buNone/>
                       </a:pPr>
                       <a:r>
-                        <a:rPr lang="en-US" sz="1300" dirty="0">
+                        <a:rPr lang="en-US" sz="1500" dirty="0">
                           <a:solidFill>
                             <a:srgbClr val="141B26"/>
                           </a:solidFill>
@@ -7029,7 +6930,7 @@
                         </a:rPr>
                         <a:t>Maurice Wilkins</a:t>
                       </a:r>
-                      <a:endParaRPr lang="en-US" sz="1300" dirty="0">
+                      <a:endParaRPr lang="en-US" sz="1500" dirty="0">
                         <a:latin typeface="Calibri" charset="0"/>
                         <a:ea typeface="Calibri" charset="0"/>
                         <a:cs typeface="Calibri" charset="0"/>
@@ -7084,7 +6985,7 @@
                         <a:buNone/>
                       </a:pPr>
                       <a:r>
-                        <a:rPr lang="en-US" sz="1300" dirty="0">
+                        <a:rPr lang="en-US" sz="1500" dirty="0">
                           <a:solidFill>
                             <a:srgbClr val="141B26"/>
                           </a:solidFill>
@@ -7094,7 +6995,7 @@
                         </a:rPr>
                         <a:t>Took X-ray photos; showed Franklin's photo to Watson; tested and corrected the model for years</a:t>
                       </a:r>
-                      <a:endParaRPr lang="en-US" sz="1300" dirty="0">
+                      <a:endParaRPr lang="en-US" sz="1500" dirty="0">
                         <a:latin typeface="Calibri" charset="0"/>
                         <a:ea typeface="Calibri" charset="0"/>
                         <a:cs typeface="Calibri" charset="0"/>
@@ -7151,7 +7052,7 @@
                         <a:buNone/>
                       </a:pPr>
                       <a:r>
-                        <a:rPr lang="en-US" sz="1300" dirty="0">
+                        <a:rPr lang="en-US" sz="1500" dirty="0">
                           <a:solidFill>
                             <a:srgbClr val="141B26"/>
                           </a:solidFill>
@@ -7161,7 +7062,7 @@
                         </a:rPr>
                         <a:t>James Watson</a:t>
                       </a:r>
-                      <a:endParaRPr lang="en-US" sz="1300" dirty="0">
+                      <a:endParaRPr lang="en-US" sz="1500" dirty="0">
                         <a:latin typeface="Calibri" charset="0"/>
                         <a:ea typeface="Calibri" charset="0"/>
                         <a:cs typeface="Calibri" charset="0"/>
@@ -7216,7 +7117,7 @@
                         <a:buNone/>
                       </a:pPr>
                       <a:r>
-                        <a:rPr lang="en-US" sz="1300" dirty="0">
+                        <a:rPr lang="en-US" sz="1500" dirty="0">
                           <a:solidFill>
                             <a:srgbClr val="141B26"/>
                           </a:solidFill>
@@ -7226,7 +7127,7 @@
                         </a:rPr>
                         <a:t>Saw from the photo that DNA was a spiral; built the double helix model with Crick</a:t>
                       </a:r>
-                      <a:endParaRPr lang="en-US" sz="1300" dirty="0">
+                      <a:endParaRPr lang="en-US" sz="1500" dirty="0">
                         <a:latin typeface="Calibri" charset="0"/>
                         <a:ea typeface="Calibri" charset="0"/>
                         <a:cs typeface="Calibri" charset="0"/>
@@ -7283,7 +7184,7 @@
                         <a:buNone/>
                       </a:pPr>
                       <a:r>
-                        <a:rPr lang="en-US" sz="1300" dirty="0">
+                        <a:rPr lang="en-US" sz="1500" dirty="0">
                           <a:solidFill>
                             <a:srgbClr val="141B26"/>
                           </a:solidFill>
@@ -7293,7 +7194,7 @@
                         </a:rPr>
                         <a:t>Francis Crick</a:t>
                       </a:r>
-                      <a:endParaRPr lang="en-US" sz="1300" dirty="0">
+                      <a:endParaRPr lang="en-US" sz="1500" dirty="0">
                         <a:latin typeface="Calibri" charset="0"/>
                         <a:ea typeface="Calibri" charset="0"/>
                         <a:cs typeface="Calibri" charset="0"/>
@@ -7348,7 +7249,7 @@
                         <a:buNone/>
                       </a:pPr>
                       <a:r>
-                        <a:rPr lang="en-US" sz="1300" dirty="0">
+                        <a:rPr lang="en-US" sz="1500" dirty="0">
                           <a:solidFill>
                             <a:srgbClr val="141B26"/>
                           </a:solidFill>
@@ -7358,7 +7259,7 @@
                         </a:rPr>
                         <a:t>Built the model with Watson; worked out the shape from the X-ray evidence</a:t>
                       </a:r>
-                      <a:endParaRPr lang="en-US" sz="1300" dirty="0">
+                      <a:endParaRPr lang="en-US" sz="1500" dirty="0">
                         <a:latin typeface="Calibri" charset="0"/>
                         <a:ea typeface="Calibri" charset="0"/>
                         <a:cs typeface="Calibri" charset="0"/>
@@ -7427,63 +7328,61 @@
           <a:ln/>
         </p:spPr>
         <p:txBody>
-          <a:bodyPr wrap="square" lIns="0" tIns="0" rIns="0" bIns="0" rtlCol="0" anchor="t">
-            <a:normAutofit/>
-          </a:bodyPr>
-          <a:lstStyle/>
-          <a:p>
-            <a:pPr marL="228600" indent="-228600">
+          <a:bodyPr wrap="square" lIns="0" tIns="0" rIns="0" bIns="0" rtlCol="0" anchor="t"/>
+          <a:lstStyle/>
+          <a:p>
+            <a:pPr marL="304800" indent="-304800">
               <a:spcAft>
-                <a:spcPts val="600"/>
+                <a:spcPts val="800"/>
               </a:spcAft>
               <a:buSzPct val="100000"/>
               <a:buChar char="•"/>
             </a:pPr>
             <a:r>
-              <a:rPr lang="en-US" sz="1500" dirty="0">
+              <a:rPr lang="en-US" sz="1800" dirty="0">
                 <a:solidFill>
                   <a:srgbClr val="141B26"/>
                 </a:solidFill>
               </a:rPr>
               <a:t>All four published their work in the same edition of Nature.</a:t>
             </a:r>
-            <a:endParaRPr lang="en-US" sz="1500" dirty="0"/>
-          </a:p>
-          <a:p>
-            <a:pPr marL="228600" indent="-228600">
+            <a:endParaRPr lang="en-US" sz="1800" dirty="0"/>
+          </a:p>
+          <a:p>
+            <a:pPr marL="304800" indent="-304800">
               <a:spcAft>
-                <a:spcPts val="600"/>
+                <a:spcPts val="800"/>
               </a:spcAft>
               <a:buSzPct val="100000"/>
               <a:buChar char="•"/>
             </a:pPr>
             <a:r>
-              <a:rPr lang="en-US" sz="1500" dirty="0">
+              <a:rPr lang="en-US" sz="1800" dirty="0">
                 <a:solidFill>
                   <a:srgbClr val="141B26"/>
                 </a:solidFill>
               </a:rPr>
               <a:t>Watson, Crick and Wilkins shared the Nobel Prize in 1962.</a:t>
             </a:r>
-            <a:endParaRPr lang="en-US" sz="1500" dirty="0"/>
-          </a:p>
-          <a:p>
-            <a:pPr marL="228600" indent="-228600">
+            <a:endParaRPr lang="en-US" sz="1800" dirty="0"/>
+          </a:p>
+          <a:p>
+            <a:pPr marL="304800" indent="-304800">
               <a:spcAft>
-                <a:spcPts val="600"/>
+                <a:spcPts val="800"/>
               </a:spcAft>
               <a:buSzPct val="100000"/>
               <a:buChar char="•"/>
             </a:pPr>
             <a:r>
-              <a:rPr lang="en-US" sz="1500" dirty="0">
+              <a:rPr lang="en-US" sz="1800" dirty="0">
                 <a:solidFill>
                   <a:srgbClr val="141B26"/>
                 </a:solidFill>
               </a:rPr>
               <a:t>Franklin had died in 1958. Nobel Prizes are not given after death.</a:t>
             </a:r>
-            <a:endParaRPr lang="en-US" sz="1500" dirty="0"/>
+            <a:endParaRPr lang="en-US" sz="1800" dirty="0"/>
           </a:p>
         </p:txBody>
       </p:sp>
@@ -7530,16 +7429,14 @@
           <a:ln/>
         </p:spPr>
         <p:txBody>
-          <a:bodyPr wrap="square" lIns="0" tIns="0" rIns="0" bIns="0" rtlCol="0" anchor="ctr">
-            <a:normAutofit/>
-          </a:bodyPr>
+          <a:bodyPr wrap="square" lIns="0" tIns="0" rIns="0" bIns="0" rtlCol="0" anchor="ctr"/>
           <a:lstStyle/>
           <a:p>
             <a:pPr indent="0" marL="0">
               <a:buNone/>
             </a:pPr>
             <a:r>
-              <a:rPr lang="en-US" sz="1400" b="1" dirty="0">
+              <a:rPr lang="en-US" sz="1700" b="1" dirty="0">
                 <a:solidFill>
                   <a:srgbClr val="7B3A8E"/>
                 </a:solidFill>
@@ -7550,14 +7447,14 @@
               <a:buNone/>
             </a:pPr>
             <a:r>
-              <a:rPr lang="en-US" sz="1400" dirty="0">
+              <a:rPr lang="en-US" sz="1700" dirty="0">
                 <a:solidFill>
                   <a:srgbClr val="141B26"/>
                 </a:solidFill>
               </a:rPr>
               <a:t>Discoveries are usually made by groups of scientists sharing evidence.</a:t>
             </a:r>
-            <a:endParaRPr lang="en-US" sz="1400" dirty="0"/>
+            <a:endParaRPr lang="en-US" sz="1700" dirty="0"/>
           </a:p>
         </p:txBody>
       </p:sp>
@@ -7740,8 +7637,8 @@
         </p:nvSpPr>
         <p:spPr>
           <a:xfrm>
-            <a:off x="548640" y="6053328"/>
-            <a:ext cx="9601200" cy="292608"/>
+            <a:off x="548640" y="6035040"/>
+            <a:ext cx="9601200" cy="310896"/>
           </a:xfrm>
           <a:prstGeom prst="rect">
             <a:avLst/>
@@ -7757,7 +7654,7 @@
               <a:buNone/>
             </a:pPr>
             <a:r>
-              <a:rPr lang="en-US" sz="1200" b="1" dirty="0">
+              <a:rPr lang="en-US" sz="1400" b="1" dirty="0">
                 <a:solidFill>
                   <a:srgbClr val="7B3A8E"/>
                 </a:solidFill>
@@ -7768,14 +7665,14 @@
               <a:buNone/>
             </a:pPr>
             <a:r>
-              <a:rPr lang="en-US" sz="1200" dirty="0">
+              <a:rPr lang="en-US" sz="1400" dirty="0">
                 <a:solidFill>
                   <a:srgbClr val="7B3A8E"/>
                 </a:solidFill>
               </a:rPr>
               <a:t>nucleus   ·   chromosome   ·   DNA   ·   gene   ·   genetic information</a:t>
             </a:r>
-            <a:endParaRPr lang="en-US" sz="1200" dirty="0"/>
+            <a:endParaRPr lang="en-US" sz="1400" dirty="0"/>
           </a:p>
         </p:txBody>
       </p:sp>
@@ -7797,81 +7694,79 @@
           <a:ln/>
         </p:spPr>
         <p:txBody>
-          <a:bodyPr wrap="square" lIns="0" tIns="0" rIns="0" bIns="0" rtlCol="0" anchor="t">
-            <a:normAutofit/>
-          </a:bodyPr>
-          <a:lstStyle/>
-          <a:p>
-            <a:pPr marL="228600" indent="-228600">
+          <a:bodyPr wrap="square" lIns="0" tIns="0" rIns="0" bIns="0" rtlCol="0" anchor="t"/>
+          <a:lstStyle/>
+          <a:p>
+            <a:pPr marL="304800" indent="-304800">
               <a:spcAft>
-                <a:spcPts val="600"/>
+                <a:spcPts val="800"/>
               </a:spcAft>
               <a:buSzPct val="100000"/>
               <a:buChar char="•"/>
             </a:pPr>
             <a:r>
-              <a:rPr lang="en-US" sz="1600" dirty="0">
+              <a:rPr lang="en-US" sz="2000" dirty="0">
                 <a:solidFill>
                   <a:srgbClr val="141B26"/>
                 </a:solidFill>
               </a:rPr>
               <a:t>DNA is found in chromosomes, inside the nucleus of a cell.</a:t>
             </a:r>
-            <a:endParaRPr lang="en-US" sz="1700" dirty="0"/>
-          </a:p>
-          <a:p>
-            <a:pPr marL="228600" indent="-228600">
+            <a:endParaRPr lang="en-US" sz="2000" dirty="0"/>
+          </a:p>
+          <a:p>
+            <a:pPr marL="304800" indent="-304800">
               <a:spcAft>
-                <a:spcPts val="600"/>
+                <a:spcPts val="800"/>
               </a:spcAft>
               <a:buSzPct val="100000"/>
               <a:buChar char="•"/>
             </a:pPr>
             <a:r>
-              <a:rPr lang="en-US" sz="1600" dirty="0">
+              <a:rPr lang="en-US" sz="2000" dirty="0">
                 <a:solidFill>
                   <a:srgbClr val="141B26"/>
                 </a:solidFill>
               </a:rPr>
               <a:t>Each chromosome contains one enormously long DNA molecule.</a:t>
             </a:r>
-            <a:endParaRPr lang="en-US" sz="1700" dirty="0"/>
-          </a:p>
-          <a:p>
-            <a:pPr marL="228600" indent="-228600">
+            <a:endParaRPr lang="en-US" sz="2000" dirty="0"/>
+          </a:p>
+          <a:p>
+            <a:pPr marL="304800" indent="-304800">
               <a:spcAft>
-                <a:spcPts val="600"/>
+                <a:spcPts val="800"/>
               </a:spcAft>
               <a:buSzPct val="100000"/>
               <a:buChar char="•"/>
             </a:pPr>
             <a:r>
-              <a:rPr lang="en-US" sz="1600" dirty="0">
+              <a:rPr lang="en-US" sz="2000" dirty="0">
                 <a:solidFill>
                   <a:srgbClr val="141B26"/>
                 </a:solidFill>
               </a:rPr>
               <a:t>Genes are sections of a DNA molecule. Genetic information is stored in genes.</a:t>
             </a:r>
-            <a:endParaRPr lang="en-US" sz="1700" dirty="0"/>
-          </a:p>
-          <a:p>
-            <a:pPr marL="228600" indent="-228600">
+            <a:endParaRPr lang="en-US" sz="2000" dirty="0"/>
+          </a:p>
+          <a:p>
+            <a:pPr marL="304800" indent="-304800">
               <a:spcAft>
-                <a:spcPts val="600"/>
+                <a:spcPts val="800"/>
               </a:spcAft>
               <a:buSzPct val="100000"/>
               <a:buChar char="•"/>
             </a:pPr>
             <a:r>
-              <a:rPr lang="en-US" sz="1600" dirty="0">
+              <a:rPr lang="en-US" sz="2000" dirty="0">
                 <a:solidFill>
                   <a:srgbClr val="141B26"/>
                 </a:solidFill>
               </a:rPr>
               <a:t>Genes control inherited characteristics. A few (ABO blood group) depend on one gene; most depend on many genes.</a:t>
             </a:r>
-            <a:endParaRPr lang="en-US" sz="1700" dirty="0"/>
+            <a:endParaRPr lang="en-US" sz="2000" dirty="0"/>
           </a:p>
         </p:txBody>
       </p:sp>
@@ -7942,16 +7837,14 @@
           <a:ln/>
         </p:spPr>
         <p:txBody>
-          <a:bodyPr wrap="square" lIns="0" tIns="0" rIns="0" bIns="0" rtlCol="0" anchor="ctr">
-            <a:normAutofit/>
-          </a:bodyPr>
+          <a:bodyPr wrap="square" lIns="0" tIns="0" rIns="0" bIns="0" rtlCol="0" anchor="ctr"/>
           <a:lstStyle/>
           <a:p>
             <a:pPr indent="0" marL="0">
               <a:buNone/>
             </a:pPr>
             <a:r>
-              <a:rPr lang="en-US" sz="1400" b="1" dirty="0">
+              <a:rPr lang="en-US" sz="1700" b="1" dirty="0">
                 <a:solidFill>
                   <a:srgbClr val="7B3A8E"/>
                 </a:solidFill>
@@ -7962,14 +7855,14 @@
               <a:buNone/>
             </a:pPr>
             <a:r>
-              <a:rPr lang="en-US" sz="1400" dirty="0">
+              <a:rPr lang="en-US" sz="1700" dirty="0">
                 <a:solidFill>
                   <a:srgbClr val="141B26"/>
                 </a:solidFill>
               </a:rPr>
               <a:t>cell &gt; nucleus &gt; chromosome &gt; DNA &gt; gene</a:t>
             </a:r>
-            <a:endParaRPr lang="en-US" sz="1400" dirty="0"/>
+            <a:endParaRPr lang="en-US" sz="1700" dirty="0"/>
           </a:p>
         </p:txBody>
       </p:sp>
@@ -8152,8 +8045,8 @@
         </p:nvSpPr>
         <p:spPr>
           <a:xfrm>
-            <a:off x="548640" y="6053328"/>
-            <a:ext cx="9601200" cy="292608"/>
+            <a:off x="548640" y="6035040"/>
+            <a:ext cx="9601200" cy="310896"/>
           </a:xfrm>
           <a:prstGeom prst="rect">
             <a:avLst/>
@@ -8169,7 +8062,7 @@
               <a:buNone/>
             </a:pPr>
             <a:r>
-              <a:rPr lang="en-US" sz="1200" b="1" dirty="0">
+              <a:rPr lang="en-US" sz="1400" b="1" dirty="0">
                 <a:solidFill>
                   <a:srgbClr val="7B3A8E"/>
                 </a:solidFill>
@@ -8180,14 +8073,14 @@
               <a:buNone/>
             </a:pPr>
             <a:r>
-              <a:rPr lang="en-US" sz="1200" dirty="0">
+              <a:rPr lang="en-US" sz="1400" dirty="0">
                 <a:solidFill>
                   <a:srgbClr val="7B3A8E"/>
                 </a:solidFill>
               </a:rPr>
               <a:t>sex chromosomes   ·   gamete   ·   zygote</a:t>
             </a:r>
-            <a:endParaRPr lang="en-US" sz="1200" dirty="0"/>
+            <a:endParaRPr lang="en-US" sz="1400" dirty="0"/>
           </a:p>
         </p:txBody>
       </p:sp>
@@ -8209,81 +8102,79 @@
           <a:ln/>
         </p:spPr>
         <p:txBody>
-          <a:bodyPr wrap="square" lIns="0" tIns="0" rIns="0" bIns="0" rtlCol="0" anchor="t">
-            <a:normAutofit/>
-          </a:bodyPr>
-          <a:lstStyle/>
-          <a:p>
-            <a:pPr marL="228600" indent="-228600">
+          <a:bodyPr wrap="square" lIns="0" tIns="0" rIns="0" bIns="0" rtlCol="0" anchor="t"/>
+          <a:lstStyle/>
+          <a:p>
+            <a:pPr marL="304800" indent="-304800">
               <a:spcAft>
-                <a:spcPts val="600"/>
+                <a:spcPts val="800"/>
               </a:spcAft>
               <a:buSzPct val="100000"/>
               <a:buChar char="•"/>
             </a:pPr>
             <a:r>
-              <a:rPr lang="en-US" sz="1700" dirty="0">
+              <a:rPr lang="en-US" sz="2000" dirty="0">
                 <a:solidFill>
                   <a:srgbClr val="141B26"/>
                 </a:solidFill>
               </a:rPr>
               <a:t>Most human cells contain 23 pairs of chromosomes: 46 in all.</a:t>
             </a:r>
-            <a:endParaRPr lang="en-US" sz="1700" dirty="0"/>
-          </a:p>
-          <a:p>
-            <a:pPr marL="228600" indent="-228600">
+            <a:endParaRPr lang="en-US" sz="2000" dirty="0"/>
+          </a:p>
+          <a:p>
+            <a:pPr marL="304800" indent="-304800">
               <a:spcAft>
-                <a:spcPts val="600"/>
+                <a:spcPts val="800"/>
               </a:spcAft>
               <a:buSzPct val="100000"/>
               <a:buChar char="•"/>
             </a:pPr>
             <a:r>
-              <a:rPr lang="en-US" sz="1700" dirty="0">
+              <a:rPr lang="en-US" sz="2000" dirty="0">
                 <a:solidFill>
                   <a:srgbClr val="141B26"/>
                 </a:solidFill>
               </a:rPr>
               <a:t>Both chromosomes in a pair carry the same genes and are the same size, except the sex chromosomes: XX (female), XY (male). Y is much smaller.</a:t>
             </a:r>
-            <a:endParaRPr lang="en-US" sz="1700" dirty="0"/>
-          </a:p>
-          <a:p>
-            <a:pPr marL="228600" indent="-228600">
+            <a:endParaRPr lang="en-US" sz="2000" dirty="0"/>
+          </a:p>
+          <a:p>
+            <a:pPr marL="304800" indent="-304800">
               <a:spcAft>
-                <a:spcPts val="600"/>
+                <a:spcPts val="800"/>
               </a:spcAft>
               <a:buSzPct val="100000"/>
               <a:buChar char="•"/>
             </a:pPr>
             <a:r>
-              <a:rPr lang="en-US" sz="1700" dirty="0">
+              <a:rPr lang="en-US" sz="2000" dirty="0">
                 <a:solidFill>
                   <a:srgbClr val="141B26"/>
                 </a:solidFill>
               </a:rPr>
               <a:t>Gametes contain only 23 chromosomes. When two gametes fuse, the zygote has 46.</a:t>
             </a:r>
-            <a:endParaRPr lang="en-US" sz="1700" dirty="0"/>
-          </a:p>
-          <a:p>
-            <a:pPr marL="228600" indent="-228600">
+            <a:endParaRPr lang="en-US" sz="2000" dirty="0"/>
+          </a:p>
+          <a:p>
+            <a:pPr marL="304800" indent="-304800">
               <a:spcAft>
-                <a:spcPts val="600"/>
+                <a:spcPts val="800"/>
               </a:spcAft>
               <a:buSzPct val="100000"/>
               <a:buChar char="•"/>
             </a:pPr>
             <a:r>
-              <a:rPr lang="en-US" sz="1700" dirty="0">
+              <a:rPr lang="en-US" sz="2000" dirty="0">
                 <a:solidFill>
                   <a:srgbClr val="141B26"/>
                 </a:solidFill>
               </a:rPr>
               <a:t>Cell division then copies the 46 chromosomes into every new cell.</a:t>
             </a:r>
-            <a:endParaRPr lang="en-US" sz="1700" dirty="0"/>
+            <a:endParaRPr lang="en-US" sz="2000" dirty="0"/>
           </a:p>
         </p:txBody>
       </p:sp>
@@ -8320,7 +8211,7 @@
         <p:spPr>
           <a:xfrm>
             <a:off x="6583680" y="4983480"/>
-            <a:ext cx="5029200" cy="502920"/>
+            <a:ext cx="5029200" cy="548640"/>
           </a:xfrm>
           <a:prstGeom prst="rect">
             <a:avLst/>
@@ -8336,7 +8227,7 @@
               <a:buNone/>
             </a:pPr>
             <a:r>
-              <a:rPr lang="en-US" sz="1100" dirty="0">
+              <a:rPr lang="en-US" sz="1300" dirty="0">
                 <a:solidFill>
                   <a:srgbClr val="141B26"/>
                 </a:solidFill>
@@ -8346,21 +8237,21 @@
             <a:pPr algn="l" indent="0" marL="0">
               <a:buNone/>
             </a:pPr>
-            <a:endParaRPr lang="en-US" sz="1100" dirty="0"/>
+            <a:endParaRPr lang="en-US" sz="1300" dirty="0"/>
           </a:p>
           <a:p>
             <a:pPr algn="l" indent="0" marL="0">
               <a:buNone/>
             </a:pPr>
             <a:r>
-              <a:rPr lang="en-US" sz="800" dirty="0">
+              <a:rPr lang="en-US" sz="900" dirty="0">
                 <a:solidFill>
                   <a:srgbClr val="5B6574"/>
                 </a:solidFill>
               </a:rPr>
               <a:t>Image: Can H., CC BY 2.0, via Wikimedia Commons</a:t>
             </a:r>
-            <a:endParaRPr lang="en-US" sz="1100" dirty="0"/>
+            <a:endParaRPr lang="en-US" sz="1300" dirty="0"/>
           </a:p>
         </p:txBody>
       </p:sp>
@@ -8407,16 +8298,14 @@
           <a:ln/>
         </p:spPr>
         <p:txBody>
-          <a:bodyPr wrap="square" lIns="0" tIns="0" rIns="0" bIns="0" rtlCol="0" anchor="ctr">
-            <a:normAutofit/>
-          </a:bodyPr>
+          <a:bodyPr wrap="square" lIns="0" tIns="0" rIns="0" bIns="0" rtlCol="0" anchor="ctr"/>
           <a:lstStyle/>
           <a:p>
             <a:pPr indent="0" marL="0">
               <a:buNone/>
             </a:pPr>
             <a:r>
-              <a:rPr lang="en-US" sz="1400" b="1" dirty="0">
+              <a:rPr lang="en-US" sz="1700" b="1" dirty="0">
                 <a:solidFill>
                   <a:srgbClr val="7B3A8E"/>
                 </a:solidFill>
@@ -8427,14 +8316,14 @@
               <a:buNone/>
             </a:pPr>
             <a:r>
-              <a:rPr lang="en-US" sz="1400" dirty="0">
+              <a:rPr lang="en-US" sz="1700" dirty="0">
                 <a:solidFill>
                   <a:srgbClr val="141B26"/>
                 </a:solidFill>
               </a:rPr>
               <a:t>Body cells: 46 (23 pairs). Gametes: 23. Zygote: 23 + 23 = 46.</a:t>
             </a:r>
-            <a:endParaRPr lang="en-US" sz="1400" dirty="0"/>
+            <a:endParaRPr lang="en-US" sz="1700" dirty="0"/>
           </a:p>
         </p:txBody>
       </p:sp>
@@ -8634,14 +8523,14 @@
               <a:buNone/>
             </a:pPr>
             <a:r>
-              <a:rPr lang="en-US" sz="1400" i="1" dirty="0">
+              <a:rPr lang="en-US" sz="1600" i="1" dirty="0">
                 <a:solidFill>
                   <a:srgbClr val="5B6574"/>
                 </a:solidFill>
               </a:rPr>
               <a:t>Mini whiteboards. Short answers.</a:t>
             </a:r>
-            <a:endParaRPr lang="en-US" sz="1400" dirty="0"/>
+            <a:endParaRPr lang="en-US" sz="1600" dirty="0"/>
           </a:p>
         </p:txBody>
       </p:sp>
@@ -8690,16 +8579,14 @@
           <a:ln/>
         </p:spPr>
         <p:txBody>
-          <a:bodyPr wrap="square" lIns="0" tIns="0" rIns="0" bIns="0" rtlCol="0" anchor="ctr">
-            <a:normAutofit/>
-          </a:bodyPr>
+          <a:bodyPr wrap="square" lIns="0" tIns="0" rIns="0" bIns="0" rtlCol="0" anchor="ctr"/>
           <a:lstStyle/>
           <a:p>
             <a:pPr indent="0" marL="0">
               <a:buNone/>
             </a:pPr>
             <a:r>
-              <a:rPr lang="en-US" sz="1600" b="1" dirty="0">
+              <a:rPr lang="en-US" sz="2000" b="1" dirty="0">
                 <a:solidFill>
                   <a:srgbClr val="7B3A8E"/>
                 </a:solidFill>
@@ -8710,14 +8597,14 @@
               <a:buNone/>
             </a:pPr>
             <a:r>
-              <a:rPr lang="en-US" sz="1600" dirty="0">
+              <a:rPr lang="en-US" sz="2000" dirty="0">
                 <a:solidFill>
                   <a:srgbClr val="141B26"/>
                 </a:solidFill>
               </a:rPr>
               <a:t>How many chromosomes are in a human sperm cell?</a:t>
             </a:r>
-            <a:endParaRPr lang="en-US" sz="1600" dirty="0"/>
+            <a:endParaRPr lang="en-US" sz="2000" dirty="0"/>
           </a:p>
         </p:txBody>
       </p:sp>
@@ -8766,16 +8653,14 @@
           <a:ln/>
         </p:spPr>
         <p:txBody>
-          <a:bodyPr wrap="square" lIns="0" tIns="0" rIns="0" bIns="0" rtlCol="0" anchor="ctr">
-            <a:normAutofit/>
-          </a:bodyPr>
+          <a:bodyPr wrap="square" lIns="0" tIns="0" rIns="0" bIns="0" rtlCol="0" anchor="ctr"/>
           <a:lstStyle/>
           <a:p>
             <a:pPr indent="0" marL="0">
               <a:buNone/>
             </a:pPr>
             <a:r>
-              <a:rPr lang="en-US" sz="1600" b="1" dirty="0">
+              <a:rPr lang="en-US" sz="2000" b="1" dirty="0">
                 <a:solidFill>
                   <a:srgbClr val="7B3A8E"/>
                 </a:solidFill>
@@ -8786,14 +8671,14 @@
               <a:buNone/>
             </a:pPr>
             <a:r>
-              <a:rPr lang="en-US" sz="1600" dirty="0">
+              <a:rPr lang="en-US" sz="2000" dirty="0">
                 <a:solidFill>
                   <a:srgbClr val="141B26"/>
                 </a:solidFill>
               </a:rPr>
               <a:t>How many chromosomes are in a human heart muscle cell?</a:t>
             </a:r>
-            <a:endParaRPr lang="en-US" sz="1600" dirty="0"/>
+            <a:endParaRPr lang="en-US" sz="2000" dirty="0"/>
           </a:p>
         </p:txBody>
       </p:sp>
@@ -8842,16 +8727,14 @@
           <a:ln/>
         </p:spPr>
         <p:txBody>
-          <a:bodyPr wrap="square" lIns="0" tIns="0" rIns="0" bIns="0" rtlCol="0" anchor="ctr">
-            <a:normAutofit/>
-          </a:bodyPr>
+          <a:bodyPr wrap="square" lIns="0" tIns="0" rIns="0" bIns="0" rtlCol="0" anchor="ctr"/>
           <a:lstStyle/>
           <a:p>
             <a:pPr indent="0" marL="0">
               <a:buNone/>
             </a:pPr>
             <a:r>
-              <a:rPr lang="en-US" sz="1600" b="1" dirty="0">
+              <a:rPr lang="en-US" sz="2000" b="1" dirty="0">
                 <a:solidFill>
                   <a:srgbClr val="7B3A8E"/>
                 </a:solidFill>
@@ -8862,14 +8745,14 @@
               <a:buNone/>
             </a:pPr>
             <a:r>
-              <a:rPr lang="en-US" sz="1600" dirty="0">
+              <a:rPr lang="en-US" sz="2000" dirty="0">
                 <a:solidFill>
                   <a:srgbClr val="141B26"/>
                 </a:solidFill>
               </a:rPr>
               <a:t>What long molecule does a chromosome contain?</a:t>
             </a:r>
-            <a:endParaRPr lang="en-US" sz="1600" dirty="0"/>
+            <a:endParaRPr lang="en-US" sz="2000" dirty="0"/>
           </a:p>
         </p:txBody>
       </p:sp>
@@ -8918,16 +8801,14 @@
           <a:ln/>
         </p:spPr>
         <p:txBody>
-          <a:bodyPr wrap="square" lIns="0" tIns="0" rIns="0" bIns="0" rtlCol="0" anchor="ctr">
-            <a:normAutofit/>
-          </a:bodyPr>
+          <a:bodyPr wrap="square" lIns="0" tIns="0" rIns="0" bIns="0" rtlCol="0" anchor="ctr"/>
           <a:lstStyle/>
           <a:p>
             <a:pPr indent="0" marL="0">
               <a:buNone/>
             </a:pPr>
             <a:r>
-              <a:rPr lang="en-US" sz="1600" b="1" dirty="0">
+              <a:rPr lang="en-US" sz="2000" b="1" dirty="0">
                 <a:solidFill>
                   <a:srgbClr val="7B3A8E"/>
                 </a:solidFill>
@@ -8938,14 +8819,14 @@
               <a:buNone/>
             </a:pPr>
             <a:r>
-              <a:rPr lang="en-US" sz="1600" dirty="0">
+              <a:rPr lang="en-US" sz="2000" dirty="0">
                 <a:solidFill>
                   <a:srgbClr val="141B26"/>
                 </a:solidFill>
               </a:rPr>
               <a:t>Who took the X-ray photos of DNA?</a:t>
             </a:r>
-            <a:endParaRPr lang="en-US" sz="1600" dirty="0"/>
+            <a:endParaRPr lang="en-US" sz="2000" dirty="0"/>
           </a:p>
         </p:txBody>
       </p:sp>
@@ -8994,16 +8875,14 @@
           <a:ln/>
         </p:spPr>
         <p:txBody>
-          <a:bodyPr wrap="square" lIns="0" tIns="0" rIns="0" bIns="0" rtlCol="0" anchor="ctr">
-            <a:normAutofit/>
-          </a:bodyPr>
+          <a:bodyPr wrap="square" lIns="0" tIns="0" rIns="0" bIns="0" rtlCol="0" anchor="ctr"/>
           <a:lstStyle/>
           <a:p>
             <a:pPr indent="0" marL="0">
               <a:buNone/>
             </a:pPr>
             <a:r>
-              <a:rPr lang="en-US" sz="1600" b="1" dirty="0">
+              <a:rPr lang="en-US" sz="2000" b="1" dirty="0">
                 <a:solidFill>
                   <a:srgbClr val="7B3A8E"/>
                 </a:solidFill>
@@ -9014,14 +8893,14 @@
               <a:buNone/>
             </a:pPr>
             <a:r>
-              <a:rPr lang="en-US" sz="1600" dirty="0">
+              <a:rPr lang="en-US" sz="2000" dirty="0">
                 <a:solidFill>
                   <a:srgbClr val="141B26"/>
                 </a:solidFill>
               </a:rPr>
               <a:t>A cell has an X and a Y chromosome. Male or female?</a:t>
             </a:r>
-            <a:endParaRPr lang="en-US" sz="1600" dirty="0"/>
+            <a:endParaRPr lang="en-US" sz="2000" dirty="0"/>
           </a:p>
         </p:txBody>
       </p:sp>
